--- a/lab8/presentation/presentation.pptx
+++ b/lab8/presentation/presentation.pptx
@@ -5,10 +5,10 @@
     <p:sldMasterId id="2147483660" r:id="rId1"/>
   </p:sldMasterIdLst>
   <p:notesMasterIdLst>
-    <p:notesMasterId r:id="rId20"/>
+    <p:notesMasterId r:id="rId22"/>
   </p:notesMasterIdLst>
   <p:handoutMasterIdLst>
-    <p:handoutMasterId r:id="rId21"/>
+    <p:handoutMasterId r:id="rId23"/>
   </p:handoutMasterIdLst>
   <p:sldIdLst>
     <p:sldId id="276" r:id="rId2"/>
@@ -27,8 +27,10 @@
     <p:sldId id="289" r:id="rId15"/>
     <p:sldId id="290" r:id="rId16"/>
     <p:sldId id="291" r:id="rId17"/>
-    <p:sldId id="292" r:id="rId18"/>
-    <p:sldId id="293" r:id="rId19"/>
+    <p:sldId id="294" r:id="rId18"/>
+    <p:sldId id="295" r:id="rId19"/>
+    <p:sldId id="292" r:id="rId20"/>
+    <p:sldId id="293" r:id="rId21"/>
   </p:sldIdLst>
   <p:sldSz cx="12192000" cy="6858000"/>
   <p:notesSz cx="6858000" cy="9144000"/>
@@ -148,6 +150,8 @@
             <p14:sldId id="289"/>
             <p14:sldId id="290"/>
             <p14:sldId id="291"/>
+            <p14:sldId id="294"/>
+            <p14:sldId id="295"/>
             <p14:sldId id="292"/>
             <p14:sldId id="293"/>
           </p14:sldIdLst>
@@ -265,7 +269,7 @@
             <a:pPr rtl="0"/>
             <a:fld id="{3EF2CABD-ADFB-4662-86FE-964DAD288E0E}" type="datetime1">
               <a:rPr lang="ru-RU" smtClean="0"/>
-              <a:t>05.02.2026</a:t>
+              <a:t>08.02.2026</a:t>
             </a:fld>
             <a:endParaRPr lang="ru-RU"/>
           </a:p>
@@ -435,7 +439,7 @@
             <a:fld id="{68B812D4-DBF0-450F-B19D-420CCD76CB60}" type="datetime1">
               <a:rPr lang="ru-RU" smtClean="0"/>
               <a:pPr/>
-              <a:t>05.02.2026</a:t>
+              <a:t>08.02.2026</a:t>
             </a:fld>
             <a:endParaRPr lang="ru-RU" dirty="0"/>
           </a:p>
@@ -1461,7 +1465,7 @@
     </p:spTree>
     <p:extLst>
       <p:ext uri="{BB962C8B-B14F-4D97-AF65-F5344CB8AC3E}">
-        <p14:creationId xmlns:p14="http://schemas.microsoft.com/office/powerpoint/2010/main" val="4099261550"/>
+        <p14:creationId xmlns:p14="http://schemas.microsoft.com/office/powerpoint/2010/main" val="2664338396"/>
       </p:ext>
     </p:extLst>
   </p:cSld>
@@ -1546,7 +1550,92 @@
     </p:spTree>
     <p:extLst>
       <p:ext uri="{BB962C8B-B14F-4D97-AF65-F5344CB8AC3E}">
-        <p14:creationId xmlns:p14="http://schemas.microsoft.com/office/powerpoint/2010/main" val="3127528433"/>
+        <p14:creationId xmlns:p14="http://schemas.microsoft.com/office/powerpoint/2010/main" val="818235692"/>
+      </p:ext>
+    </p:extLst>
+  </p:cSld>
+  <p:clrMapOvr>
+    <a:masterClrMapping/>
+  </p:clrMapOvr>
+</p:notes>
+</file>
+
+<file path=ppt/notesSlides/notesSlide19.xml><?xml version="1.0" encoding="utf-8"?>
+<p:notes xmlns:a="http://schemas.openxmlformats.org/drawingml/2006/main" xmlns:r="http://schemas.openxmlformats.org/officeDocument/2006/relationships" xmlns:p="http://schemas.openxmlformats.org/presentationml/2006/main">
+  <p:cSld>
+    <p:spTree>
+      <p:nvGrpSpPr>
+        <p:cNvPr id="1" name=""/>
+        <p:cNvGrpSpPr/>
+        <p:nvPr/>
+      </p:nvGrpSpPr>
+      <p:grpSpPr>
+        <a:xfrm>
+          <a:off x="0" y="0"/>
+          <a:ext cx="0" cy="0"/>
+          <a:chOff x="0" y="0"/>
+          <a:chExt cx="0" cy="0"/>
+        </a:xfrm>
+      </p:grpSpPr>
+      <p:sp>
+        <p:nvSpPr>
+          <p:cNvPr id="2" name="Образ слайда 1"/>
+          <p:cNvSpPr>
+            <a:spLocks noGrp="1" noRot="1" noChangeAspect="1"/>
+          </p:cNvSpPr>
+          <p:nvPr>
+            <p:ph type="sldImg"/>
+          </p:nvPr>
+        </p:nvSpPr>
+        <p:spPr/>
+      </p:sp>
+      <p:sp>
+        <p:nvSpPr>
+          <p:cNvPr id="3" name="Заметки 2"/>
+          <p:cNvSpPr>
+            <a:spLocks noGrp="1"/>
+          </p:cNvSpPr>
+          <p:nvPr>
+            <p:ph type="body" idx="1"/>
+          </p:nvPr>
+        </p:nvSpPr>
+        <p:spPr/>
+        <p:txBody>
+          <a:bodyPr/>
+          <a:lstStyle/>
+          <a:p>
+            <a:endParaRPr lang="ru-RU"/>
+          </a:p>
+        </p:txBody>
+      </p:sp>
+      <p:sp>
+        <p:nvSpPr>
+          <p:cNvPr id="4" name="Номер слайда 3"/>
+          <p:cNvSpPr>
+            <a:spLocks noGrp="1"/>
+          </p:cNvSpPr>
+          <p:nvPr>
+            <p:ph type="sldNum" sz="quarter" idx="5"/>
+          </p:nvPr>
+        </p:nvSpPr>
+        <p:spPr/>
+        <p:txBody>
+          <a:bodyPr/>
+          <a:lstStyle/>
+          <a:p>
+            <a:pPr rtl="0"/>
+            <a:fld id="{DF61EA0F-A667-4B49-8422-0062BC55E249}" type="slidenum">
+              <a:rPr lang="ru-RU" smtClean="0"/>
+              <a:t>19</a:t>
+            </a:fld>
+            <a:endParaRPr lang="ru-RU"/>
+          </a:p>
+        </p:txBody>
+      </p:sp>
+    </p:spTree>
+    <p:extLst>
+      <p:ext uri="{BB962C8B-B14F-4D97-AF65-F5344CB8AC3E}">
+        <p14:creationId xmlns:p14="http://schemas.microsoft.com/office/powerpoint/2010/main" val="4099261550"/>
       </p:ext>
     </p:extLst>
   </p:cSld>
@@ -1632,6 +1721,91 @@
     <p:extLst>
       <p:ext uri="{BB962C8B-B14F-4D97-AF65-F5344CB8AC3E}">
         <p14:creationId xmlns:p14="http://schemas.microsoft.com/office/powerpoint/2010/main" val="447398730"/>
+      </p:ext>
+    </p:extLst>
+  </p:cSld>
+  <p:clrMapOvr>
+    <a:masterClrMapping/>
+  </p:clrMapOvr>
+</p:notes>
+</file>
+
+<file path=ppt/notesSlides/notesSlide20.xml><?xml version="1.0" encoding="utf-8"?>
+<p:notes xmlns:a="http://schemas.openxmlformats.org/drawingml/2006/main" xmlns:r="http://schemas.openxmlformats.org/officeDocument/2006/relationships" xmlns:p="http://schemas.openxmlformats.org/presentationml/2006/main">
+  <p:cSld>
+    <p:spTree>
+      <p:nvGrpSpPr>
+        <p:cNvPr id="1" name=""/>
+        <p:cNvGrpSpPr/>
+        <p:nvPr/>
+      </p:nvGrpSpPr>
+      <p:grpSpPr>
+        <a:xfrm>
+          <a:off x="0" y="0"/>
+          <a:ext cx="0" cy="0"/>
+          <a:chOff x="0" y="0"/>
+          <a:chExt cx="0" cy="0"/>
+        </a:xfrm>
+      </p:grpSpPr>
+      <p:sp>
+        <p:nvSpPr>
+          <p:cNvPr id="2" name="Образ слайда 1"/>
+          <p:cNvSpPr>
+            <a:spLocks noGrp="1" noRot="1" noChangeAspect="1"/>
+          </p:cNvSpPr>
+          <p:nvPr>
+            <p:ph type="sldImg"/>
+          </p:nvPr>
+        </p:nvSpPr>
+        <p:spPr/>
+      </p:sp>
+      <p:sp>
+        <p:nvSpPr>
+          <p:cNvPr id="3" name="Заметки 2"/>
+          <p:cNvSpPr>
+            <a:spLocks noGrp="1"/>
+          </p:cNvSpPr>
+          <p:nvPr>
+            <p:ph type="body" idx="1"/>
+          </p:nvPr>
+        </p:nvSpPr>
+        <p:spPr/>
+        <p:txBody>
+          <a:bodyPr/>
+          <a:lstStyle/>
+          <a:p>
+            <a:endParaRPr lang="ru-RU"/>
+          </a:p>
+        </p:txBody>
+      </p:sp>
+      <p:sp>
+        <p:nvSpPr>
+          <p:cNvPr id="4" name="Номер слайда 3"/>
+          <p:cNvSpPr>
+            <a:spLocks noGrp="1"/>
+          </p:cNvSpPr>
+          <p:nvPr>
+            <p:ph type="sldNum" sz="quarter" idx="5"/>
+          </p:nvPr>
+        </p:nvSpPr>
+        <p:spPr/>
+        <p:txBody>
+          <a:bodyPr/>
+          <a:lstStyle/>
+          <a:p>
+            <a:pPr rtl="0"/>
+            <a:fld id="{DF61EA0F-A667-4B49-8422-0062BC55E249}" type="slidenum">
+              <a:rPr lang="ru-RU" smtClean="0"/>
+              <a:t>20</a:t>
+            </a:fld>
+            <a:endParaRPr lang="ru-RU"/>
+          </a:p>
+        </p:txBody>
+      </p:sp>
+    </p:spTree>
+    <p:extLst>
+      <p:ext uri="{BB962C8B-B14F-4D97-AF65-F5344CB8AC3E}">
+        <p14:creationId xmlns:p14="http://schemas.microsoft.com/office/powerpoint/2010/main" val="3127528433"/>
       </p:ext>
     </p:extLst>
   </p:cSld>
@@ -2674,7 +2848,7 @@
             <a:pPr rtl="0"/>
             <a:fld id="{94BFA7FF-3CFD-4CAD-BB9E-67BC1F4C890D}" type="datetime1">
               <a:rPr lang="ru-RU" noProof="0" smtClean="0"/>
-              <a:t>05.02.2026</a:t>
+              <a:t>08.02.2026</a:t>
             </a:fld>
             <a:endParaRPr lang="ru-RU" noProof="0"/>
           </a:p>
@@ -3300,7 +3474,7 @@
             <a:pPr rtl="0"/>
             <a:fld id="{0E309820-F966-41D6-9A9E-F094402396DD}" type="datetime1">
               <a:rPr lang="ru-RU" noProof="0" smtClean="0"/>
-              <a:t>05.02.2026</a:t>
+              <a:t>08.02.2026</a:t>
             </a:fld>
             <a:endParaRPr lang="ru-RU" noProof="0" dirty="0"/>
           </a:p>
@@ -3906,12 +4080,92 @@
           <a:chExt cx="0" cy="0"/>
         </a:xfrm>
       </p:grpSpPr>
+      <p:sp>
+        <p:nvSpPr>
+          <p:cNvPr id="5" name="TextBox 4">
+            <a:extLst>
+              <a:ext uri="{FF2B5EF4-FFF2-40B4-BE49-F238E27FC236}">
+                <a16:creationId xmlns:a16="http://schemas.microsoft.com/office/drawing/2014/main" id="{42F33BE5-C375-4ADF-AABE-393BA449B1BB}"/>
+              </a:ext>
+            </a:extLst>
+          </p:cNvPr>
+          <p:cNvSpPr txBox="1"/>
+          <p:nvPr/>
+        </p:nvSpPr>
+        <p:spPr>
+          <a:xfrm>
+            <a:off x="3047999" y="6234884"/>
+            <a:ext cx="6096000" cy="369332"/>
+          </a:xfrm>
+          <a:prstGeom prst="rect">
+            <a:avLst/>
+          </a:prstGeom>
+          <a:noFill/>
+        </p:spPr>
+        <p:txBody>
+          <a:bodyPr wrap="square">
+            <a:spAutoFit/>
+          </a:bodyPr>
+          <a:lstStyle/>
+          <a:p>
+            <a:pPr algn="ctr">
+              <a:spcAft>
+                <a:spcPts val="600"/>
+              </a:spcAft>
+            </a:pPr>
+            <a:r>
+              <a:rPr lang="ru-RU" sz="1800" i="1" dirty="0">
+                <a:effectLst/>
+                <a:latin typeface="Cambria" panose="02040503050406030204" pitchFamily="18" charset="0"/>
+                <a:ea typeface="Cambria" panose="02040503050406030204" pitchFamily="18" charset="0"/>
+                <a:cs typeface="Times New Roman" panose="02020603050405020304" pitchFamily="18" charset="0"/>
+              </a:rPr>
+              <a:t>Рис. 9: Портфельные инвестиции</a:t>
+            </a:r>
+          </a:p>
+        </p:txBody>
+      </p:sp>
+      <p:sp>
+        <p:nvSpPr>
+          <p:cNvPr id="6" name="TextBox 5">
+            <a:extLst>
+              <a:ext uri="{FF2B5EF4-FFF2-40B4-BE49-F238E27FC236}">
+                <a16:creationId xmlns:a16="http://schemas.microsoft.com/office/drawing/2014/main" id="{4CAF03D3-46DD-429C-BECB-6603FAFBADA2}"/>
+              </a:ext>
+            </a:extLst>
+          </p:cNvPr>
+          <p:cNvSpPr txBox="1"/>
+          <p:nvPr/>
+        </p:nvSpPr>
+        <p:spPr>
+          <a:xfrm>
+            <a:off x="513348" y="724663"/>
+            <a:ext cx="6096000" cy="369332"/>
+          </a:xfrm>
+          <a:prstGeom prst="rect">
+            <a:avLst/>
+          </a:prstGeom>
+          <a:noFill/>
+        </p:spPr>
+        <p:txBody>
+          <a:bodyPr wrap="square">
+            <a:spAutoFit/>
+          </a:bodyPr>
+          <a:lstStyle/>
+          <a:p>
+            <a:r>
+              <a:rPr lang="ru-RU" dirty="0"/>
+              <a:t>Выполнение лабораторной работы</a:t>
+            </a:r>
+          </a:p>
+        </p:txBody>
+      </p:sp>
       <p:pic>
         <p:nvPicPr>
-          <p:cNvPr id="3" name="Рисунок 2">
+          <p:cNvPr id="4" name="Рисунок 3">
             <a:extLst>
               <a:ext uri="{FF2B5EF4-FFF2-40B4-BE49-F238E27FC236}">
-                <a16:creationId xmlns:a16="http://schemas.microsoft.com/office/drawing/2014/main" id="{63932A0F-0904-4073-9118-A684AC442366}"/>
+                <a16:creationId xmlns:a16="http://schemas.microsoft.com/office/drawing/2014/main" id="{4BE99607-E317-4D64-9ACD-1D34FD611824}"/>
               </a:ext>
             </a:extLst>
           </p:cNvPr>
@@ -3928,94 +4182,14 @@
         </p:blipFill>
         <p:spPr>
           <a:xfrm>
-            <a:off x="1747230" y="1838103"/>
-            <a:ext cx="8697539" cy="3181794"/>
+            <a:off x="1961572" y="1340015"/>
+            <a:ext cx="8268854" cy="4648849"/>
           </a:xfrm>
           <a:prstGeom prst="rect">
             <a:avLst/>
           </a:prstGeom>
         </p:spPr>
       </p:pic>
-      <p:sp>
-        <p:nvSpPr>
-          <p:cNvPr id="5" name="TextBox 4">
-            <a:extLst>
-              <a:ext uri="{FF2B5EF4-FFF2-40B4-BE49-F238E27FC236}">
-                <a16:creationId xmlns:a16="http://schemas.microsoft.com/office/drawing/2014/main" id="{42F33BE5-C375-4ADF-AABE-393BA449B1BB}"/>
-              </a:ext>
-            </a:extLst>
-          </p:cNvPr>
-          <p:cNvSpPr txBox="1"/>
-          <p:nvPr/>
-        </p:nvSpPr>
-        <p:spPr>
-          <a:xfrm>
-            <a:off x="3914274" y="5831123"/>
-            <a:ext cx="6096000" cy="369332"/>
-          </a:xfrm>
-          <a:prstGeom prst="rect">
-            <a:avLst/>
-          </a:prstGeom>
-          <a:noFill/>
-        </p:spPr>
-        <p:txBody>
-          <a:bodyPr wrap="square">
-            <a:spAutoFit/>
-          </a:bodyPr>
-          <a:lstStyle/>
-          <a:p>
-            <a:pPr>
-              <a:spcAft>
-                <a:spcPts val="600"/>
-              </a:spcAft>
-            </a:pPr>
-            <a:r>
-              <a:rPr lang="ru-RU" sz="1800" i="1" dirty="0">
-                <a:effectLst/>
-                <a:latin typeface="Cambria" panose="02040503050406030204" pitchFamily="18" charset="0"/>
-                <a:ea typeface="Cambria" panose="02040503050406030204" pitchFamily="18" charset="0"/>
-                <a:cs typeface="Times New Roman" panose="02020603050405020304" pitchFamily="18" charset="0"/>
-              </a:rPr>
-              <a:t>Рис. 9: Примеры определения функций</a:t>
-            </a:r>
-          </a:p>
-        </p:txBody>
-      </p:sp>
-      <p:sp>
-        <p:nvSpPr>
-          <p:cNvPr id="6" name="TextBox 5">
-            <a:extLst>
-              <a:ext uri="{FF2B5EF4-FFF2-40B4-BE49-F238E27FC236}">
-                <a16:creationId xmlns:a16="http://schemas.microsoft.com/office/drawing/2014/main" id="{4CAF03D3-46DD-429C-BECB-6603FAFBADA2}"/>
-              </a:ext>
-            </a:extLst>
-          </p:cNvPr>
-          <p:cNvSpPr txBox="1"/>
-          <p:nvPr/>
-        </p:nvSpPr>
-        <p:spPr>
-          <a:xfrm>
-            <a:off x="513348" y="724663"/>
-            <a:ext cx="6096000" cy="369332"/>
-          </a:xfrm>
-          <a:prstGeom prst="rect">
-            <a:avLst/>
-          </a:prstGeom>
-          <a:noFill/>
-        </p:spPr>
-        <p:txBody>
-          <a:bodyPr wrap="square">
-            <a:spAutoFit/>
-          </a:bodyPr>
-          <a:lstStyle/>
-          <a:p>
-            <a:r>
-              <a:rPr lang="ru-RU" dirty="0"/>
-              <a:t>Примеры</a:t>
-            </a:r>
-          </a:p>
-        </p:txBody>
-      </p:sp>
     </p:spTree>
     <p:extLst>
       <p:ext uri="{BB962C8B-B14F-4D97-AF65-F5344CB8AC3E}">
@@ -4054,12 +4228,92 @@
           <a:chExt cx="0" cy="0"/>
         </a:xfrm>
       </p:grpSpPr>
+      <p:sp>
+        <p:nvSpPr>
+          <p:cNvPr id="5" name="TextBox 4">
+            <a:extLst>
+              <a:ext uri="{FF2B5EF4-FFF2-40B4-BE49-F238E27FC236}">
+                <a16:creationId xmlns:a16="http://schemas.microsoft.com/office/drawing/2014/main" id="{8F2D8463-A125-4817-8EA4-33905602BD62}"/>
+              </a:ext>
+            </a:extLst>
+          </p:cNvPr>
+          <p:cNvSpPr txBox="1"/>
+          <p:nvPr/>
+        </p:nvSpPr>
+        <p:spPr>
+          <a:xfrm>
+            <a:off x="3048000" y="6167739"/>
+            <a:ext cx="6096000" cy="369332"/>
+          </a:xfrm>
+          <a:prstGeom prst="rect">
+            <a:avLst/>
+          </a:prstGeom>
+          <a:noFill/>
+        </p:spPr>
+        <p:txBody>
+          <a:bodyPr wrap="square">
+            <a:spAutoFit/>
+          </a:bodyPr>
+          <a:lstStyle/>
+          <a:p>
+            <a:pPr algn="ctr">
+              <a:spcAft>
+                <a:spcPts val="600"/>
+              </a:spcAft>
+            </a:pPr>
+            <a:r>
+              <a:rPr lang="ru-RU" sz="1800" i="1" dirty="0">
+                <a:effectLst/>
+                <a:latin typeface="Cambria" panose="02040503050406030204" pitchFamily="18" charset="0"/>
+                <a:ea typeface="Cambria" panose="02040503050406030204" pitchFamily="18" charset="0"/>
+                <a:cs typeface="Times New Roman" panose="02020603050405020304" pitchFamily="18" charset="0"/>
+              </a:rPr>
+              <a:t>Рис. 10: Восстановление изображения</a:t>
+            </a:r>
+          </a:p>
+        </p:txBody>
+      </p:sp>
+      <p:sp>
+        <p:nvSpPr>
+          <p:cNvPr id="6" name="TextBox 5">
+            <a:extLst>
+              <a:ext uri="{FF2B5EF4-FFF2-40B4-BE49-F238E27FC236}">
+                <a16:creationId xmlns:a16="http://schemas.microsoft.com/office/drawing/2014/main" id="{D0FDDC69-A7F6-4489-9D55-DD2A153E8911}"/>
+              </a:ext>
+            </a:extLst>
+          </p:cNvPr>
+          <p:cNvSpPr txBox="1"/>
+          <p:nvPr/>
+        </p:nvSpPr>
+        <p:spPr>
+          <a:xfrm>
+            <a:off x="513348" y="724663"/>
+            <a:ext cx="6096000" cy="369332"/>
+          </a:xfrm>
+          <a:prstGeom prst="rect">
+            <a:avLst/>
+          </a:prstGeom>
+          <a:noFill/>
+        </p:spPr>
+        <p:txBody>
+          <a:bodyPr wrap="square">
+            <a:spAutoFit/>
+          </a:bodyPr>
+          <a:lstStyle/>
+          <a:p>
+            <a:r>
+              <a:rPr lang="ru-RU" dirty="0"/>
+              <a:t>Выполнение лабораторной работы</a:t>
+            </a:r>
+          </a:p>
+        </p:txBody>
+      </p:sp>
       <p:pic>
         <p:nvPicPr>
-          <p:cNvPr id="3" name="Рисунок 2">
+          <p:cNvPr id="4" name="Рисунок 3">
             <a:extLst>
               <a:ext uri="{FF2B5EF4-FFF2-40B4-BE49-F238E27FC236}">
-                <a16:creationId xmlns:a16="http://schemas.microsoft.com/office/drawing/2014/main" id="{B1BED566-9EE4-4E08-BCE2-566B8C1ECEBD}"/>
+                <a16:creationId xmlns:a16="http://schemas.microsoft.com/office/drawing/2014/main" id="{349192D1-199F-4F3B-AEBA-339646A302DF}"/>
               </a:ext>
             </a:extLst>
           </p:cNvPr>
@@ -4076,94 +4330,14 @@
         </p:blipFill>
         <p:spPr>
           <a:xfrm>
-            <a:off x="2130780" y="1406365"/>
-            <a:ext cx="7930440" cy="4449004"/>
+            <a:off x="4484552" y="617905"/>
+            <a:ext cx="3265469" cy="5549834"/>
           </a:xfrm>
           <a:prstGeom prst="rect">
             <a:avLst/>
           </a:prstGeom>
         </p:spPr>
       </p:pic>
-      <p:sp>
-        <p:nvSpPr>
-          <p:cNvPr id="5" name="TextBox 4">
-            <a:extLst>
-              <a:ext uri="{FF2B5EF4-FFF2-40B4-BE49-F238E27FC236}">
-                <a16:creationId xmlns:a16="http://schemas.microsoft.com/office/drawing/2014/main" id="{8F2D8463-A125-4817-8EA4-33905602BD62}"/>
-              </a:ext>
-            </a:extLst>
-          </p:cNvPr>
-          <p:cNvSpPr txBox="1"/>
-          <p:nvPr/>
-        </p:nvSpPr>
-        <p:spPr>
-          <a:xfrm>
-            <a:off x="3965220" y="6071754"/>
-            <a:ext cx="6096000" cy="369332"/>
-          </a:xfrm>
-          <a:prstGeom prst="rect">
-            <a:avLst/>
-          </a:prstGeom>
-          <a:noFill/>
-        </p:spPr>
-        <p:txBody>
-          <a:bodyPr wrap="square">
-            <a:spAutoFit/>
-          </a:bodyPr>
-          <a:lstStyle/>
-          <a:p>
-            <a:pPr>
-              <a:spcAft>
-                <a:spcPts val="600"/>
-              </a:spcAft>
-            </a:pPr>
-            <a:r>
-              <a:rPr lang="ru-RU" sz="1800" i="1" dirty="0">
-                <a:effectLst/>
-                <a:latin typeface="Cambria" panose="02040503050406030204" pitchFamily="18" charset="0"/>
-                <a:ea typeface="Cambria" panose="02040503050406030204" pitchFamily="18" charset="0"/>
-                <a:cs typeface="Times New Roman" panose="02020603050405020304" pitchFamily="18" charset="0"/>
-              </a:rPr>
-              <a:t>Рис. 10: Примеры работы с массивами</a:t>
-            </a:r>
-          </a:p>
-        </p:txBody>
-      </p:sp>
-      <p:sp>
-        <p:nvSpPr>
-          <p:cNvPr id="6" name="TextBox 5">
-            <a:extLst>
-              <a:ext uri="{FF2B5EF4-FFF2-40B4-BE49-F238E27FC236}">
-                <a16:creationId xmlns:a16="http://schemas.microsoft.com/office/drawing/2014/main" id="{D0FDDC69-A7F6-4489-9D55-DD2A153E8911}"/>
-              </a:ext>
-            </a:extLst>
-          </p:cNvPr>
-          <p:cNvSpPr txBox="1"/>
-          <p:nvPr/>
-        </p:nvSpPr>
-        <p:spPr>
-          <a:xfrm>
-            <a:off x="513348" y="724663"/>
-            <a:ext cx="6096000" cy="369332"/>
-          </a:xfrm>
-          <a:prstGeom prst="rect">
-            <a:avLst/>
-          </a:prstGeom>
-          <a:noFill/>
-        </p:spPr>
-        <p:txBody>
-          <a:bodyPr wrap="square">
-            <a:spAutoFit/>
-          </a:bodyPr>
-          <a:lstStyle/>
-          <a:p>
-            <a:r>
-              <a:rPr lang="ru-RU" dirty="0"/>
-              <a:t>Примеры</a:t>
-            </a:r>
-          </a:p>
-        </p:txBody>
-      </p:sp>
     </p:spTree>
     <p:extLst>
       <p:ext uri="{BB962C8B-B14F-4D97-AF65-F5344CB8AC3E}">
@@ -4202,12 +4376,92 @@
           <a:chExt cx="0" cy="0"/>
         </a:xfrm>
       </p:grpSpPr>
+      <p:sp>
+        <p:nvSpPr>
+          <p:cNvPr id="5" name="TextBox 4">
+            <a:extLst>
+              <a:ext uri="{FF2B5EF4-FFF2-40B4-BE49-F238E27FC236}">
+                <a16:creationId xmlns:a16="http://schemas.microsoft.com/office/drawing/2014/main" id="{3FADB599-F230-4305-8085-67C052B9E80F}"/>
+              </a:ext>
+            </a:extLst>
+          </p:cNvPr>
+          <p:cNvSpPr txBox="1"/>
+          <p:nvPr/>
+        </p:nvSpPr>
+        <p:spPr>
+          <a:xfrm>
+            <a:off x="625642" y="6261879"/>
+            <a:ext cx="10940715" cy="369332"/>
+          </a:xfrm>
+          <a:prstGeom prst="rect">
+            <a:avLst/>
+          </a:prstGeom>
+          <a:noFill/>
+        </p:spPr>
+        <p:txBody>
+          <a:bodyPr wrap="square">
+            <a:spAutoFit/>
+          </a:bodyPr>
+          <a:lstStyle/>
+          <a:p>
+            <a:pPr algn="ctr">
+              <a:spcAft>
+                <a:spcPts val="600"/>
+              </a:spcAft>
+            </a:pPr>
+            <a:r>
+              <a:rPr lang="ru-RU" sz="1800" i="1" dirty="0">
+                <a:effectLst/>
+                <a:latin typeface="Cambria" panose="02040503050406030204" pitchFamily="18" charset="0"/>
+                <a:ea typeface="Cambria" panose="02040503050406030204" pitchFamily="18" charset="0"/>
+                <a:cs typeface="Times New Roman" panose="02020603050405020304" pitchFamily="18" charset="0"/>
+              </a:rPr>
+              <a:t>Рис. 11: Восстановление изображения</a:t>
+            </a:r>
+          </a:p>
+        </p:txBody>
+      </p:sp>
+      <p:sp>
+        <p:nvSpPr>
+          <p:cNvPr id="7" name="TextBox 6">
+            <a:extLst>
+              <a:ext uri="{FF2B5EF4-FFF2-40B4-BE49-F238E27FC236}">
+                <a16:creationId xmlns:a16="http://schemas.microsoft.com/office/drawing/2014/main" id="{976E3FB2-5FF2-40D0-91B1-C38630883A2E}"/>
+              </a:ext>
+            </a:extLst>
+          </p:cNvPr>
+          <p:cNvSpPr txBox="1"/>
+          <p:nvPr/>
+        </p:nvSpPr>
+        <p:spPr>
+          <a:xfrm>
+            <a:off x="605589" y="726749"/>
+            <a:ext cx="6312568" cy="369332"/>
+          </a:xfrm>
+          <a:prstGeom prst="rect">
+            <a:avLst/>
+          </a:prstGeom>
+          <a:noFill/>
+        </p:spPr>
+        <p:txBody>
+          <a:bodyPr wrap="square">
+            <a:spAutoFit/>
+          </a:bodyPr>
+          <a:lstStyle/>
+          <a:p>
+            <a:r>
+              <a:rPr lang="ru-RU" dirty="0"/>
+              <a:t>Выполнение лабораторной работы</a:t>
+            </a:r>
+          </a:p>
+        </p:txBody>
+      </p:sp>
       <p:pic>
         <p:nvPicPr>
-          <p:cNvPr id="3" name="Рисунок 2">
+          <p:cNvPr id="4" name="Рисунок 3">
             <a:extLst>
               <a:ext uri="{FF2B5EF4-FFF2-40B4-BE49-F238E27FC236}">
-                <a16:creationId xmlns:a16="http://schemas.microsoft.com/office/drawing/2014/main" id="{A9C0B00E-2677-472B-AE84-8F4BD11F360F}"/>
+                <a16:creationId xmlns:a16="http://schemas.microsoft.com/office/drawing/2014/main" id="{DE74A422-1973-4F52-9488-19D842D6590B}"/>
               </a:ext>
             </a:extLst>
           </p:cNvPr>
@@ -4224,94 +4478,14 @@
         </p:blipFill>
         <p:spPr>
           <a:xfrm>
-            <a:off x="3158690" y="1360957"/>
-            <a:ext cx="5874620" cy="4546146"/>
+            <a:off x="3698283" y="1235034"/>
+            <a:ext cx="4795432" cy="5063716"/>
           </a:xfrm>
           <a:prstGeom prst="rect">
             <a:avLst/>
           </a:prstGeom>
         </p:spPr>
       </p:pic>
-      <p:sp>
-        <p:nvSpPr>
-          <p:cNvPr id="5" name="TextBox 4">
-            <a:extLst>
-              <a:ext uri="{FF2B5EF4-FFF2-40B4-BE49-F238E27FC236}">
-                <a16:creationId xmlns:a16="http://schemas.microsoft.com/office/drawing/2014/main" id="{3FADB599-F230-4305-8085-67C052B9E80F}"/>
-              </a:ext>
-            </a:extLst>
-          </p:cNvPr>
-          <p:cNvSpPr txBox="1"/>
-          <p:nvPr/>
-        </p:nvSpPr>
-        <p:spPr>
-          <a:xfrm>
-            <a:off x="1684421" y="6067524"/>
-            <a:ext cx="10940715" cy="369332"/>
-          </a:xfrm>
-          <a:prstGeom prst="rect">
-            <a:avLst/>
-          </a:prstGeom>
-          <a:noFill/>
-        </p:spPr>
-        <p:txBody>
-          <a:bodyPr wrap="square">
-            <a:spAutoFit/>
-          </a:bodyPr>
-          <a:lstStyle/>
-          <a:p>
-            <a:pPr>
-              <a:spcAft>
-                <a:spcPts val="600"/>
-              </a:spcAft>
-            </a:pPr>
-            <a:r>
-              <a:rPr lang="ru-RU" sz="1800" i="1" dirty="0">
-                <a:effectLst/>
-                <a:latin typeface="Cambria" panose="02040503050406030204" pitchFamily="18" charset="0"/>
-                <a:ea typeface="Cambria" panose="02040503050406030204" pitchFamily="18" charset="0"/>
-                <a:cs typeface="Times New Roman" panose="02020603050405020304" pitchFamily="18" charset="0"/>
-              </a:rPr>
-              <a:t>Рис. 11: Примеры работы с функциями для чтения/записи/вывода информации на экран</a:t>
-            </a:r>
-          </a:p>
-        </p:txBody>
-      </p:sp>
-      <p:sp>
-        <p:nvSpPr>
-          <p:cNvPr id="7" name="TextBox 6">
-            <a:extLst>
-              <a:ext uri="{FF2B5EF4-FFF2-40B4-BE49-F238E27FC236}">
-                <a16:creationId xmlns:a16="http://schemas.microsoft.com/office/drawing/2014/main" id="{976E3FB2-5FF2-40D0-91B1-C38630883A2E}"/>
-              </a:ext>
-            </a:extLst>
-          </p:cNvPr>
-          <p:cNvSpPr txBox="1"/>
-          <p:nvPr/>
-        </p:nvSpPr>
-        <p:spPr>
-          <a:xfrm>
-            <a:off x="605589" y="726749"/>
-            <a:ext cx="6312568" cy="369332"/>
-          </a:xfrm>
-          <a:prstGeom prst="rect">
-            <a:avLst/>
-          </a:prstGeom>
-          <a:noFill/>
-        </p:spPr>
-        <p:txBody>
-          <a:bodyPr wrap="square">
-            <a:spAutoFit/>
-          </a:bodyPr>
-          <a:lstStyle/>
-          <a:p>
-            <a:r>
-              <a:rPr lang="ru-RU" dirty="0"/>
-              <a:t>Примеры для задания №1 </a:t>
-            </a:r>
-          </a:p>
-        </p:txBody>
-      </p:sp>
     </p:spTree>
     <p:extLst>
       <p:ext uri="{BB962C8B-B14F-4D97-AF65-F5344CB8AC3E}">
@@ -4350,12 +4524,92 @@
           <a:chExt cx="0" cy="0"/>
         </a:xfrm>
       </p:grpSpPr>
+      <p:sp>
+        <p:nvSpPr>
+          <p:cNvPr id="5" name="TextBox 4">
+            <a:extLst>
+              <a:ext uri="{FF2B5EF4-FFF2-40B4-BE49-F238E27FC236}">
+                <a16:creationId xmlns:a16="http://schemas.microsoft.com/office/drawing/2014/main" id="{130CA9F0-82BA-4D63-973B-D5BB98177517}"/>
+              </a:ext>
+            </a:extLst>
+          </p:cNvPr>
+          <p:cNvSpPr txBox="1"/>
+          <p:nvPr/>
+        </p:nvSpPr>
+        <p:spPr>
+          <a:xfrm>
+            <a:off x="3048000" y="6193841"/>
+            <a:ext cx="6096000" cy="369332"/>
+          </a:xfrm>
+          <a:prstGeom prst="rect">
+            <a:avLst/>
+          </a:prstGeom>
+          <a:noFill/>
+        </p:spPr>
+        <p:txBody>
+          <a:bodyPr wrap="square">
+            <a:spAutoFit/>
+          </a:bodyPr>
+          <a:lstStyle/>
+          <a:p>
+            <a:pPr algn="ctr">
+              <a:spcAft>
+                <a:spcPts val="600"/>
+              </a:spcAft>
+            </a:pPr>
+            <a:r>
+              <a:rPr lang="ru-RU" sz="1800" i="1" dirty="0">
+                <a:effectLst/>
+                <a:latin typeface="Cambria" panose="02040503050406030204" pitchFamily="18" charset="0"/>
+                <a:ea typeface="Cambria" panose="02040503050406030204" pitchFamily="18" charset="0"/>
+                <a:cs typeface="Times New Roman" panose="02020603050405020304" pitchFamily="18" charset="0"/>
+              </a:rPr>
+              <a:t>Рис. 12: Восстановление изображения</a:t>
+            </a:r>
+          </a:p>
+        </p:txBody>
+      </p:sp>
+      <p:sp>
+        <p:nvSpPr>
+          <p:cNvPr id="7" name="TextBox 6">
+            <a:extLst>
+              <a:ext uri="{FF2B5EF4-FFF2-40B4-BE49-F238E27FC236}">
+                <a16:creationId xmlns:a16="http://schemas.microsoft.com/office/drawing/2014/main" id="{D62C8341-B20A-4316-87DA-421815315383}"/>
+              </a:ext>
+            </a:extLst>
+          </p:cNvPr>
+          <p:cNvSpPr txBox="1"/>
+          <p:nvPr/>
+        </p:nvSpPr>
+        <p:spPr>
+          <a:xfrm>
+            <a:off x="545432" y="769840"/>
+            <a:ext cx="6096000" cy="369332"/>
+          </a:xfrm>
+          <a:prstGeom prst="rect">
+            <a:avLst/>
+          </a:prstGeom>
+          <a:noFill/>
+        </p:spPr>
+        <p:txBody>
+          <a:bodyPr wrap="square">
+            <a:spAutoFit/>
+          </a:bodyPr>
+          <a:lstStyle/>
+          <a:p>
+            <a:r>
+              <a:rPr lang="ru-RU" dirty="0"/>
+              <a:t>Выполнение лабораторной работы</a:t>
+            </a:r>
+          </a:p>
+        </p:txBody>
+      </p:sp>
       <p:pic>
         <p:nvPicPr>
-          <p:cNvPr id="3" name="Рисунок 2">
+          <p:cNvPr id="4" name="Рисунок 3">
             <a:extLst>
               <a:ext uri="{FF2B5EF4-FFF2-40B4-BE49-F238E27FC236}">
-                <a16:creationId xmlns:a16="http://schemas.microsoft.com/office/drawing/2014/main" id="{4C85F244-0653-46AB-8A45-44D96DAC1354}"/>
+                <a16:creationId xmlns:a16="http://schemas.microsoft.com/office/drawing/2014/main" id="{C3871078-E923-4C28-838F-B792AC95CFC6}"/>
               </a:ext>
             </a:extLst>
           </p:cNvPr>
@@ -4372,109 +4626,14 @@
         </p:blipFill>
         <p:spPr>
           <a:xfrm>
-            <a:off x="2942785" y="3095578"/>
-            <a:ext cx="6306430" cy="666843"/>
+            <a:off x="2990002" y="1413855"/>
+            <a:ext cx="6211995" cy="4674305"/>
           </a:xfrm>
           <a:prstGeom prst="rect">
             <a:avLst/>
           </a:prstGeom>
         </p:spPr>
       </p:pic>
-      <p:sp>
-        <p:nvSpPr>
-          <p:cNvPr id="5" name="TextBox 4">
-            <a:extLst>
-              <a:ext uri="{FF2B5EF4-FFF2-40B4-BE49-F238E27FC236}">
-                <a16:creationId xmlns:a16="http://schemas.microsoft.com/office/drawing/2014/main" id="{130CA9F0-82BA-4D63-973B-D5BB98177517}"/>
-              </a:ext>
-            </a:extLst>
-          </p:cNvPr>
-          <p:cNvSpPr txBox="1"/>
-          <p:nvPr/>
-        </p:nvSpPr>
-        <p:spPr>
-          <a:xfrm>
-            <a:off x="3737810" y="5718828"/>
-            <a:ext cx="6096000" cy="369332"/>
-          </a:xfrm>
-          <a:prstGeom prst="rect">
-            <a:avLst/>
-          </a:prstGeom>
-          <a:noFill/>
-        </p:spPr>
-        <p:txBody>
-          <a:bodyPr wrap="square">
-            <a:spAutoFit/>
-          </a:bodyPr>
-          <a:lstStyle/>
-          <a:p>
-            <a:pPr>
-              <a:spcAft>
-                <a:spcPts val="600"/>
-              </a:spcAft>
-            </a:pPr>
-            <a:r>
-              <a:rPr lang="ru-RU" sz="1800" i="1" dirty="0">
-                <a:effectLst/>
-                <a:latin typeface="Cambria" panose="02040503050406030204" pitchFamily="18" charset="0"/>
-                <a:ea typeface="Cambria" panose="02040503050406030204" pitchFamily="18" charset="0"/>
-                <a:cs typeface="Times New Roman" panose="02020603050405020304" pitchFamily="18" charset="0"/>
-              </a:rPr>
-              <a:t>Рис. 12: Пример работы с функцией </a:t>
-            </a:r>
-            <a:r>
-              <a:rPr lang="ru-RU" sz="1800" i="1" dirty="0" err="1">
-                <a:effectLst/>
-                <a:latin typeface="Cambria" panose="02040503050406030204" pitchFamily="18" charset="0"/>
-                <a:ea typeface="Cambria" panose="02040503050406030204" pitchFamily="18" charset="0"/>
-                <a:cs typeface="Times New Roman" panose="02020603050405020304" pitchFamily="18" charset="0"/>
-              </a:rPr>
-              <a:t>parse</a:t>
-            </a:r>
-            <a:endParaRPr lang="ru-RU" sz="1800" i="1" dirty="0">
-              <a:effectLst/>
-              <a:latin typeface="Cambria" panose="02040503050406030204" pitchFamily="18" charset="0"/>
-              <a:ea typeface="Cambria" panose="02040503050406030204" pitchFamily="18" charset="0"/>
-              <a:cs typeface="Times New Roman" panose="02020603050405020304" pitchFamily="18" charset="0"/>
-            </a:endParaRPr>
-          </a:p>
-        </p:txBody>
-      </p:sp>
-      <p:sp>
-        <p:nvSpPr>
-          <p:cNvPr id="7" name="TextBox 6">
-            <a:extLst>
-              <a:ext uri="{FF2B5EF4-FFF2-40B4-BE49-F238E27FC236}">
-                <a16:creationId xmlns:a16="http://schemas.microsoft.com/office/drawing/2014/main" id="{D62C8341-B20A-4316-87DA-421815315383}"/>
-              </a:ext>
-            </a:extLst>
-          </p:cNvPr>
-          <p:cNvSpPr txBox="1"/>
-          <p:nvPr/>
-        </p:nvSpPr>
-        <p:spPr>
-          <a:xfrm>
-            <a:off x="545432" y="769840"/>
-            <a:ext cx="6096000" cy="369332"/>
-          </a:xfrm>
-          <a:prstGeom prst="rect">
-            <a:avLst/>
-          </a:prstGeom>
-          <a:noFill/>
-        </p:spPr>
-        <p:txBody>
-          <a:bodyPr wrap="square">
-            <a:spAutoFit/>
-          </a:bodyPr>
-          <a:lstStyle/>
-          <a:p>
-            <a:r>
-              <a:rPr lang="ru-RU" dirty="0"/>
-              <a:t>Примеры для задания №2 </a:t>
-            </a:r>
-          </a:p>
-        </p:txBody>
-      </p:sp>
     </p:spTree>
     <p:extLst>
       <p:ext uri="{BB962C8B-B14F-4D97-AF65-F5344CB8AC3E}">
@@ -4513,12 +4672,92 @@
           <a:chExt cx="0" cy="0"/>
         </a:xfrm>
       </p:grpSpPr>
+      <p:sp>
+        <p:nvSpPr>
+          <p:cNvPr id="5" name="TextBox 4">
+            <a:extLst>
+              <a:ext uri="{FF2B5EF4-FFF2-40B4-BE49-F238E27FC236}">
+                <a16:creationId xmlns:a16="http://schemas.microsoft.com/office/drawing/2014/main" id="{BE0DAB82-6461-470E-85C1-B28593EFE655}"/>
+              </a:ext>
+            </a:extLst>
+          </p:cNvPr>
+          <p:cNvSpPr txBox="1"/>
+          <p:nvPr/>
+        </p:nvSpPr>
+        <p:spPr>
+          <a:xfrm>
+            <a:off x="2951747" y="6243873"/>
+            <a:ext cx="7507705" cy="369332"/>
+          </a:xfrm>
+          <a:prstGeom prst="rect">
+            <a:avLst/>
+          </a:prstGeom>
+          <a:noFill/>
+        </p:spPr>
+        <p:txBody>
+          <a:bodyPr wrap="square">
+            <a:spAutoFit/>
+          </a:bodyPr>
+          <a:lstStyle/>
+          <a:p>
+            <a:pPr algn="ctr">
+              <a:spcAft>
+                <a:spcPts val="600"/>
+              </a:spcAft>
+            </a:pPr>
+            <a:r>
+              <a:rPr lang="ru-RU" sz="1800" i="1" dirty="0">
+                <a:effectLst/>
+                <a:latin typeface="Cambria" panose="02040503050406030204" pitchFamily="18" charset="0"/>
+                <a:ea typeface="Cambria" panose="02040503050406030204" pitchFamily="18" charset="0"/>
+                <a:cs typeface="Times New Roman" panose="02020603050405020304" pitchFamily="18" charset="0"/>
+              </a:rPr>
+              <a:t>Рис. 13: Задание 1. Линейное программирование</a:t>
+            </a:r>
+          </a:p>
+        </p:txBody>
+      </p:sp>
+      <p:sp>
+        <p:nvSpPr>
+          <p:cNvPr id="7" name="TextBox 6">
+            <a:extLst>
+              <a:ext uri="{FF2B5EF4-FFF2-40B4-BE49-F238E27FC236}">
+                <a16:creationId xmlns:a16="http://schemas.microsoft.com/office/drawing/2014/main" id="{9C1B08A6-C6D2-47A9-B427-B369BDE7F935}"/>
+              </a:ext>
+            </a:extLst>
+          </p:cNvPr>
+          <p:cNvSpPr txBox="1"/>
+          <p:nvPr/>
+        </p:nvSpPr>
+        <p:spPr>
+          <a:xfrm>
+            <a:off x="609600" y="755357"/>
+            <a:ext cx="6096000" cy="369332"/>
+          </a:xfrm>
+          <a:prstGeom prst="rect">
+            <a:avLst/>
+          </a:prstGeom>
+          <a:noFill/>
+        </p:spPr>
+        <p:txBody>
+          <a:bodyPr wrap="square">
+            <a:spAutoFit/>
+          </a:bodyPr>
+          <a:lstStyle/>
+          <a:p>
+            <a:r>
+              <a:rPr lang="ru-RU" dirty="0"/>
+              <a:t>Выполнение лабораторной работы</a:t>
+            </a:r>
+          </a:p>
+        </p:txBody>
+      </p:sp>
       <p:pic>
         <p:nvPicPr>
-          <p:cNvPr id="3" name="Рисунок 2">
+          <p:cNvPr id="4" name="Рисунок 3">
             <a:extLst>
               <a:ext uri="{FF2B5EF4-FFF2-40B4-BE49-F238E27FC236}">
-                <a16:creationId xmlns:a16="http://schemas.microsoft.com/office/drawing/2014/main" id="{44F66372-8FDA-4DD2-88E0-CB7BF3FE1E2C}"/>
+                <a16:creationId xmlns:a16="http://schemas.microsoft.com/office/drawing/2014/main" id="{1736C8C7-E70E-4211-826A-453EB29FBF20}"/>
               </a:ext>
             </a:extLst>
           </p:cNvPr>
@@ -4535,94 +4774,14 @@
         </p:blipFill>
         <p:spPr>
           <a:xfrm>
-            <a:off x="4079916" y="1314153"/>
-            <a:ext cx="4032167" cy="4697514"/>
+            <a:off x="880334" y="1290182"/>
+            <a:ext cx="10431331" cy="4953691"/>
           </a:xfrm>
           <a:prstGeom prst="rect">
             <a:avLst/>
           </a:prstGeom>
         </p:spPr>
       </p:pic>
-      <p:sp>
-        <p:nvSpPr>
-          <p:cNvPr id="5" name="TextBox 4">
-            <a:extLst>
-              <a:ext uri="{FF2B5EF4-FFF2-40B4-BE49-F238E27FC236}">
-                <a16:creationId xmlns:a16="http://schemas.microsoft.com/office/drawing/2014/main" id="{BE0DAB82-6461-470E-85C1-B28593EFE655}"/>
-              </a:ext>
-            </a:extLst>
-          </p:cNvPr>
-          <p:cNvSpPr txBox="1"/>
-          <p:nvPr/>
-        </p:nvSpPr>
-        <p:spPr>
-          <a:xfrm>
-            <a:off x="2759242" y="6173887"/>
-            <a:ext cx="7507705" cy="369332"/>
-          </a:xfrm>
-          <a:prstGeom prst="rect">
-            <a:avLst/>
-          </a:prstGeom>
-          <a:noFill/>
-        </p:spPr>
-        <p:txBody>
-          <a:bodyPr wrap="square">
-            <a:spAutoFit/>
-          </a:bodyPr>
-          <a:lstStyle/>
-          <a:p>
-            <a:pPr>
-              <a:spcAft>
-                <a:spcPts val="600"/>
-              </a:spcAft>
-            </a:pPr>
-            <a:r>
-              <a:rPr lang="ru-RU" sz="1800" i="1" dirty="0">
-                <a:effectLst/>
-                <a:latin typeface="Cambria" panose="02040503050406030204" pitchFamily="18" charset="0"/>
-                <a:ea typeface="Cambria" panose="02040503050406030204" pitchFamily="18" charset="0"/>
-                <a:cs typeface="Times New Roman" panose="02020603050405020304" pitchFamily="18" charset="0"/>
-              </a:rPr>
-              <a:t>Рис. 13: Примеры работы базовых математических операций</a:t>
-            </a:r>
-          </a:p>
-        </p:txBody>
-      </p:sp>
-      <p:sp>
-        <p:nvSpPr>
-          <p:cNvPr id="7" name="TextBox 6">
-            <a:extLst>
-              <a:ext uri="{FF2B5EF4-FFF2-40B4-BE49-F238E27FC236}">
-                <a16:creationId xmlns:a16="http://schemas.microsoft.com/office/drawing/2014/main" id="{9C1B08A6-C6D2-47A9-B427-B369BDE7F935}"/>
-              </a:ext>
-            </a:extLst>
-          </p:cNvPr>
-          <p:cNvSpPr txBox="1"/>
-          <p:nvPr/>
-        </p:nvSpPr>
-        <p:spPr>
-          <a:xfrm>
-            <a:off x="609600" y="755357"/>
-            <a:ext cx="6096000" cy="369332"/>
-          </a:xfrm>
-          <a:prstGeom prst="rect">
-            <a:avLst/>
-          </a:prstGeom>
-          <a:noFill/>
-        </p:spPr>
-        <p:txBody>
-          <a:bodyPr wrap="square">
-            <a:spAutoFit/>
-          </a:bodyPr>
-          <a:lstStyle/>
-          <a:p>
-            <a:r>
-              <a:rPr lang="ru-RU" dirty="0"/>
-              <a:t>Примеры для задания №3 </a:t>
-            </a:r>
-          </a:p>
-        </p:txBody>
-      </p:sp>
     </p:spTree>
     <p:extLst>
       <p:ext uri="{BB962C8B-B14F-4D97-AF65-F5344CB8AC3E}">
@@ -4661,12 +4820,92 @@
           <a:chExt cx="0" cy="0"/>
         </a:xfrm>
       </p:grpSpPr>
+      <p:sp>
+        <p:nvSpPr>
+          <p:cNvPr id="5" name="TextBox 4">
+            <a:extLst>
+              <a:ext uri="{FF2B5EF4-FFF2-40B4-BE49-F238E27FC236}">
+                <a16:creationId xmlns:a16="http://schemas.microsoft.com/office/drawing/2014/main" id="{4104E127-614D-473B-A8B6-2210F9FA75C0}"/>
+              </a:ext>
+            </a:extLst>
+          </p:cNvPr>
+          <p:cNvSpPr txBox="1"/>
+          <p:nvPr/>
+        </p:nvSpPr>
+        <p:spPr>
+          <a:xfrm>
+            <a:off x="2030888" y="6162437"/>
+            <a:ext cx="8130222" cy="369332"/>
+          </a:xfrm>
+          <a:prstGeom prst="rect">
+            <a:avLst/>
+          </a:prstGeom>
+          <a:noFill/>
+        </p:spPr>
+        <p:txBody>
+          <a:bodyPr wrap="square">
+            <a:spAutoFit/>
+          </a:bodyPr>
+          <a:lstStyle/>
+          <a:p>
+            <a:pPr algn="ctr">
+              <a:spcAft>
+                <a:spcPts val="600"/>
+              </a:spcAft>
+            </a:pPr>
+            <a:r>
+              <a:rPr lang="ru-RU" sz="1800" i="1" dirty="0">
+                <a:effectLst/>
+                <a:latin typeface="Cambria" panose="02040503050406030204" pitchFamily="18" charset="0"/>
+                <a:ea typeface="Cambria" panose="02040503050406030204" pitchFamily="18" charset="0"/>
+                <a:cs typeface="Times New Roman" panose="02020603050405020304" pitchFamily="18" charset="0"/>
+              </a:rPr>
+              <a:t>Рис. 14: Задание 2. Линейное программирование. Использование массивов</a:t>
+            </a:r>
+          </a:p>
+        </p:txBody>
+      </p:sp>
+      <p:sp>
+        <p:nvSpPr>
+          <p:cNvPr id="6" name="TextBox 5">
+            <a:extLst>
+              <a:ext uri="{FF2B5EF4-FFF2-40B4-BE49-F238E27FC236}">
+                <a16:creationId xmlns:a16="http://schemas.microsoft.com/office/drawing/2014/main" id="{AA688F70-C061-47B0-9450-FB57668BF88B}"/>
+              </a:ext>
+            </a:extLst>
+          </p:cNvPr>
+          <p:cNvSpPr txBox="1"/>
+          <p:nvPr/>
+        </p:nvSpPr>
+        <p:spPr>
+          <a:xfrm>
+            <a:off x="609600" y="755357"/>
+            <a:ext cx="6096000" cy="369332"/>
+          </a:xfrm>
+          <a:prstGeom prst="rect">
+            <a:avLst/>
+          </a:prstGeom>
+          <a:noFill/>
+        </p:spPr>
+        <p:txBody>
+          <a:bodyPr wrap="square">
+            <a:spAutoFit/>
+          </a:bodyPr>
+          <a:lstStyle/>
+          <a:p>
+            <a:r>
+              <a:rPr lang="ru-RU" dirty="0"/>
+              <a:t>Выполнение лабораторной работы</a:t>
+            </a:r>
+          </a:p>
+        </p:txBody>
+      </p:sp>
       <p:pic>
         <p:nvPicPr>
-          <p:cNvPr id="3" name="Рисунок 2">
+          <p:cNvPr id="4" name="Рисунок 3">
             <a:extLst>
               <a:ext uri="{FF2B5EF4-FFF2-40B4-BE49-F238E27FC236}">
-                <a16:creationId xmlns:a16="http://schemas.microsoft.com/office/drawing/2014/main" id="{5A0C6873-3F20-493A-9A11-0FA17EF8AFC2}"/>
+                <a16:creationId xmlns:a16="http://schemas.microsoft.com/office/drawing/2014/main" id="{50ECC97E-56B3-45AF-8EF9-B960F7A7C71E}"/>
               </a:ext>
             </a:extLst>
           </p:cNvPr>
@@ -4683,94 +4922,14 @@
         </p:blipFill>
         <p:spPr>
           <a:xfrm>
-            <a:off x="2695100" y="1342196"/>
-            <a:ext cx="6801799" cy="4497130"/>
+            <a:off x="3744094" y="1246909"/>
+            <a:ext cx="4703810" cy="4956531"/>
           </a:xfrm>
           <a:prstGeom prst="rect">
             <a:avLst/>
           </a:prstGeom>
         </p:spPr>
       </p:pic>
-      <p:sp>
-        <p:nvSpPr>
-          <p:cNvPr id="5" name="TextBox 4">
-            <a:extLst>
-              <a:ext uri="{FF2B5EF4-FFF2-40B4-BE49-F238E27FC236}">
-                <a16:creationId xmlns:a16="http://schemas.microsoft.com/office/drawing/2014/main" id="{4104E127-614D-473B-A8B6-2210F9FA75C0}"/>
-              </a:ext>
-            </a:extLst>
-          </p:cNvPr>
-          <p:cNvSpPr txBox="1"/>
-          <p:nvPr/>
-        </p:nvSpPr>
-        <p:spPr>
-          <a:xfrm>
-            <a:off x="2919717" y="6029150"/>
-            <a:ext cx="6801799" cy="369332"/>
-          </a:xfrm>
-          <a:prstGeom prst="rect">
-            <a:avLst/>
-          </a:prstGeom>
-          <a:noFill/>
-        </p:spPr>
-        <p:txBody>
-          <a:bodyPr wrap="square">
-            <a:spAutoFit/>
-          </a:bodyPr>
-          <a:lstStyle/>
-          <a:p>
-            <a:pPr>
-              <a:spcAft>
-                <a:spcPts val="600"/>
-              </a:spcAft>
-            </a:pPr>
-            <a:r>
-              <a:rPr lang="ru-RU" sz="1800" i="1" dirty="0">
-                <a:effectLst/>
-                <a:latin typeface="Cambria" panose="02040503050406030204" pitchFamily="18" charset="0"/>
-                <a:ea typeface="Cambria" panose="02040503050406030204" pitchFamily="18" charset="0"/>
-                <a:cs typeface="Times New Roman" panose="02020603050405020304" pitchFamily="18" charset="0"/>
-              </a:rPr>
-              <a:t>Рис. 14: Примеры работы базовых математических операций</a:t>
-            </a:r>
-          </a:p>
-        </p:txBody>
-      </p:sp>
-      <p:sp>
-        <p:nvSpPr>
-          <p:cNvPr id="6" name="TextBox 5">
-            <a:extLst>
-              <a:ext uri="{FF2B5EF4-FFF2-40B4-BE49-F238E27FC236}">
-                <a16:creationId xmlns:a16="http://schemas.microsoft.com/office/drawing/2014/main" id="{AA688F70-C061-47B0-9450-FB57668BF88B}"/>
-              </a:ext>
-            </a:extLst>
-          </p:cNvPr>
-          <p:cNvSpPr txBox="1"/>
-          <p:nvPr/>
-        </p:nvSpPr>
-        <p:spPr>
-          <a:xfrm>
-            <a:off x="609600" y="755357"/>
-            <a:ext cx="6096000" cy="369332"/>
-          </a:xfrm>
-          <a:prstGeom prst="rect">
-            <a:avLst/>
-          </a:prstGeom>
-          <a:noFill/>
-        </p:spPr>
-        <p:txBody>
-          <a:bodyPr wrap="square">
-            <a:spAutoFit/>
-          </a:bodyPr>
-          <a:lstStyle/>
-          <a:p>
-            <a:r>
-              <a:rPr lang="ru-RU" dirty="0"/>
-              <a:t>Примеры для задания №3 </a:t>
-            </a:r>
-          </a:p>
-        </p:txBody>
-      </p:sp>
     </p:spTree>
     <p:extLst>
       <p:ext uri="{BB962C8B-B14F-4D97-AF65-F5344CB8AC3E}">
@@ -4809,12 +4968,92 @@
           <a:chExt cx="0" cy="0"/>
         </a:xfrm>
       </p:grpSpPr>
+      <p:sp>
+        <p:nvSpPr>
+          <p:cNvPr id="5" name="TextBox 4">
+            <a:extLst>
+              <a:ext uri="{FF2B5EF4-FFF2-40B4-BE49-F238E27FC236}">
+                <a16:creationId xmlns:a16="http://schemas.microsoft.com/office/drawing/2014/main" id="{CDED26EF-06FE-4E73-823D-459E0FACC06E}"/>
+              </a:ext>
+            </a:extLst>
+          </p:cNvPr>
+          <p:cNvSpPr txBox="1"/>
+          <p:nvPr/>
+        </p:nvSpPr>
+        <p:spPr>
+          <a:xfrm>
+            <a:off x="3047999" y="6162011"/>
+            <a:ext cx="6096000" cy="369332"/>
+          </a:xfrm>
+          <a:prstGeom prst="rect">
+            <a:avLst/>
+          </a:prstGeom>
+          <a:noFill/>
+        </p:spPr>
+        <p:txBody>
+          <a:bodyPr wrap="square">
+            <a:spAutoFit/>
+          </a:bodyPr>
+          <a:lstStyle/>
+          <a:p>
+            <a:pPr algn="ctr">
+              <a:spcAft>
+                <a:spcPts val="600"/>
+              </a:spcAft>
+            </a:pPr>
+            <a:r>
+              <a:rPr lang="ru-RU" sz="1800" i="1" dirty="0">
+                <a:effectLst/>
+                <a:latin typeface="Cambria" panose="02040503050406030204" pitchFamily="18" charset="0"/>
+                <a:ea typeface="Cambria" panose="02040503050406030204" pitchFamily="18" charset="0"/>
+                <a:cs typeface="Times New Roman" panose="02020603050405020304" pitchFamily="18" charset="0"/>
+              </a:rPr>
+              <a:t>Рис. 15: Задание 3. Выпуклое программирование</a:t>
+            </a:r>
+          </a:p>
+        </p:txBody>
+      </p:sp>
+      <p:sp>
+        <p:nvSpPr>
+          <p:cNvPr id="6" name="TextBox 5">
+            <a:extLst>
+              <a:ext uri="{FF2B5EF4-FFF2-40B4-BE49-F238E27FC236}">
+                <a16:creationId xmlns:a16="http://schemas.microsoft.com/office/drawing/2014/main" id="{AEECEA28-1411-418B-A719-32D49171B868}"/>
+              </a:ext>
+            </a:extLst>
+          </p:cNvPr>
+          <p:cNvSpPr txBox="1"/>
+          <p:nvPr/>
+        </p:nvSpPr>
+        <p:spPr>
+          <a:xfrm>
+            <a:off x="609600" y="755357"/>
+            <a:ext cx="6096000" cy="369332"/>
+          </a:xfrm>
+          <a:prstGeom prst="rect">
+            <a:avLst/>
+          </a:prstGeom>
+          <a:noFill/>
+        </p:spPr>
+        <p:txBody>
+          <a:bodyPr wrap="square">
+            <a:spAutoFit/>
+          </a:bodyPr>
+          <a:lstStyle/>
+          <a:p>
+            <a:r>
+              <a:rPr lang="ru-RU" dirty="0"/>
+              <a:t>Выполнение лабораторной работы</a:t>
+            </a:r>
+          </a:p>
+        </p:txBody>
+      </p:sp>
       <p:pic>
         <p:nvPicPr>
-          <p:cNvPr id="3" name="Рисунок 2">
+          <p:cNvPr id="4" name="Рисунок 3">
             <a:extLst>
               <a:ext uri="{FF2B5EF4-FFF2-40B4-BE49-F238E27FC236}">
-                <a16:creationId xmlns:a16="http://schemas.microsoft.com/office/drawing/2014/main" id="{2C4B7E5F-FA2A-4473-8445-ACEF494840B8}"/>
+                <a16:creationId xmlns:a16="http://schemas.microsoft.com/office/drawing/2014/main" id="{EB61BEDF-4A20-47DE-A5CA-AE1AE03A2253}"/>
               </a:ext>
             </a:extLst>
           </p:cNvPr>
@@ -4831,102 +5070,14 @@
         </p:blipFill>
         <p:spPr>
           <a:xfrm>
-            <a:off x="3327401" y="1431514"/>
-            <a:ext cx="5537197" cy="4608338"/>
+            <a:off x="3657600" y="1252400"/>
+            <a:ext cx="4583875" cy="4913468"/>
           </a:xfrm>
           <a:prstGeom prst="rect">
             <a:avLst/>
           </a:prstGeom>
         </p:spPr>
       </p:pic>
-      <p:sp>
-        <p:nvSpPr>
-          <p:cNvPr id="5" name="TextBox 4">
-            <a:extLst>
-              <a:ext uri="{FF2B5EF4-FFF2-40B4-BE49-F238E27FC236}">
-                <a16:creationId xmlns:a16="http://schemas.microsoft.com/office/drawing/2014/main" id="{CDED26EF-06FE-4E73-823D-459E0FACC06E}"/>
-              </a:ext>
-            </a:extLst>
-          </p:cNvPr>
-          <p:cNvSpPr txBox="1"/>
-          <p:nvPr/>
-        </p:nvSpPr>
-        <p:spPr>
-          <a:xfrm>
-            <a:off x="3327401" y="6184049"/>
-            <a:ext cx="6096000" cy="369332"/>
-          </a:xfrm>
-          <a:prstGeom prst="rect">
-            <a:avLst/>
-          </a:prstGeom>
-          <a:noFill/>
-        </p:spPr>
-        <p:txBody>
-          <a:bodyPr wrap="square">
-            <a:spAutoFit/>
-          </a:bodyPr>
-          <a:lstStyle/>
-          <a:p>
-            <a:pPr>
-              <a:spcAft>
-                <a:spcPts val="600"/>
-              </a:spcAft>
-            </a:pPr>
-            <a:r>
-              <a:rPr lang="ru-RU" sz="1800" i="1" dirty="0">
-                <a:effectLst/>
-                <a:latin typeface="Cambria" panose="02040503050406030204" pitchFamily="18" charset="0"/>
-                <a:ea typeface="Cambria" panose="02040503050406030204" pitchFamily="18" charset="0"/>
-                <a:cs typeface="Times New Roman" panose="02020603050405020304" pitchFamily="18" charset="0"/>
-              </a:rPr>
-              <a:t>Рис. 15: Примеры работы с операциями над матрицами</a:t>
-            </a:r>
-          </a:p>
-        </p:txBody>
-      </p:sp>
-      <p:sp>
-        <p:nvSpPr>
-          <p:cNvPr id="6" name="TextBox 5">
-            <a:extLst>
-              <a:ext uri="{FF2B5EF4-FFF2-40B4-BE49-F238E27FC236}">
-                <a16:creationId xmlns:a16="http://schemas.microsoft.com/office/drawing/2014/main" id="{AEECEA28-1411-418B-A719-32D49171B868}"/>
-              </a:ext>
-            </a:extLst>
-          </p:cNvPr>
-          <p:cNvSpPr txBox="1"/>
-          <p:nvPr/>
-        </p:nvSpPr>
-        <p:spPr>
-          <a:xfrm>
-            <a:off x="609600" y="755357"/>
-            <a:ext cx="6096000" cy="369332"/>
-          </a:xfrm>
-          <a:prstGeom prst="rect">
-            <a:avLst/>
-          </a:prstGeom>
-          <a:noFill/>
-        </p:spPr>
-        <p:txBody>
-          <a:bodyPr wrap="square">
-            <a:spAutoFit/>
-          </a:bodyPr>
-          <a:lstStyle/>
-          <a:p>
-            <a:r>
-              <a:rPr lang="ru-RU" dirty="0"/>
-              <a:t>Примеры для задания №</a:t>
-            </a:r>
-            <a:r>
-              <a:rPr lang="en-US" dirty="0"/>
-              <a:t>4</a:t>
-            </a:r>
-            <a:r>
-              <a:rPr lang="ru-RU" dirty="0"/>
-              <a:t> </a:t>
-            </a:r>
-          </a:p>
-        </p:txBody>
-      </p:sp>
     </p:spTree>
     <p:extLst>
       <p:ext uri="{BB962C8B-B14F-4D97-AF65-F5344CB8AC3E}">
@@ -4979,8 +5130,8 @@
         </p:nvSpPr>
         <p:spPr>
           <a:xfrm>
-            <a:off x="3048000" y="2879375"/>
-            <a:ext cx="6096000" cy="1477328"/>
+            <a:off x="3048000" y="6231550"/>
+            <a:ext cx="6096000" cy="369332"/>
           </a:xfrm>
           <a:prstGeom prst="rect">
             <a:avLst/>
@@ -4993,33 +5144,20 @@
           </a:bodyPr>
           <a:lstStyle/>
           <a:p>
-            <a:pPr>
+            <a:pPr algn="ctr">
               <a:spcAft>
                 <a:spcPts val="600"/>
               </a:spcAft>
             </a:pPr>
             <a:r>
-              <a:rPr lang="ru-RU" dirty="0"/>
-              <a:t>• В ходе выполнения лабораторной работы были получены навыки по подготовке рабочего пространства и инструментария для работы с языком программирования </a:t>
-            </a:r>
-            <a:r>
-              <a:rPr lang="ru-RU" dirty="0" err="1"/>
-              <a:t>Julia</a:t>
-            </a:r>
-            <a:r>
-              <a:rPr lang="ru-RU" dirty="0"/>
-              <a:t>, а также познакомились на простейших примерах с основами синтаксиса </a:t>
-            </a:r>
-            <a:r>
-              <a:rPr lang="ru-RU" dirty="0" err="1"/>
-              <a:t>Julia</a:t>
-            </a:r>
-            <a:endParaRPr lang="ru-RU" sz="1800" i="1" dirty="0">
-              <a:effectLst/>
-              <a:latin typeface="Cambria" panose="02040503050406030204" pitchFamily="18" charset="0"/>
-              <a:ea typeface="Cambria" panose="02040503050406030204" pitchFamily="18" charset="0"/>
-              <a:cs typeface="Times New Roman" panose="02020603050405020304" pitchFamily="18" charset="0"/>
-            </a:endParaRPr>
+              <a:rPr lang="ru-RU" sz="1800" i="1" dirty="0">
+                <a:effectLst/>
+                <a:latin typeface="Cambria" panose="02040503050406030204" pitchFamily="18" charset="0"/>
+                <a:ea typeface="Cambria" panose="02040503050406030204" pitchFamily="18" charset="0"/>
+                <a:cs typeface="Times New Roman" panose="02020603050405020304" pitchFamily="18" charset="0"/>
+              </a:rPr>
+              <a:t>Рис. 16: Задание 4. Оптимальная рассадка по залам</a:t>
+            </a:r>
           </a:p>
         </p:txBody>
       </p:sp>
@@ -5053,15 +5191,45 @@
           <a:p>
             <a:r>
               <a:rPr lang="ru-RU" dirty="0"/>
-              <a:t>Вывод</a:t>
-            </a:r>
-          </a:p>
-        </p:txBody>
-      </p:sp>
+              <a:t>Выполнение лабораторной работы</a:t>
+            </a:r>
+          </a:p>
+        </p:txBody>
+      </p:sp>
+      <p:pic>
+        <p:nvPicPr>
+          <p:cNvPr id="4" name="Рисунок 3">
+            <a:extLst>
+              <a:ext uri="{FF2B5EF4-FFF2-40B4-BE49-F238E27FC236}">
+                <a16:creationId xmlns:a16="http://schemas.microsoft.com/office/drawing/2014/main" id="{410168F4-9F17-4ABD-B946-5E146EEAEECD}"/>
+              </a:ext>
+            </a:extLst>
+          </p:cNvPr>
+          <p:cNvPicPr>
+            <a:picLocks noChangeAspect="1"/>
+          </p:cNvPicPr>
+          <p:nvPr/>
+        </p:nvPicPr>
+        <p:blipFill>
+          <a:blip r:embed="rId3"/>
+          <a:stretch>
+            <a:fillRect/>
+          </a:stretch>
+        </p:blipFill>
+        <p:spPr>
+          <a:xfrm>
+            <a:off x="3922815" y="1246909"/>
+            <a:ext cx="4346369" cy="5029032"/>
+          </a:xfrm>
+          <a:prstGeom prst="rect">
+            <a:avLst/>
+          </a:prstGeom>
+        </p:spPr>
+      </p:pic>
     </p:spTree>
     <p:extLst>
       <p:ext uri="{BB962C8B-B14F-4D97-AF65-F5344CB8AC3E}">
-        <p14:creationId xmlns:p14="http://schemas.microsoft.com/office/powerpoint/2010/main" val="74012788"/>
+        <p14:creationId xmlns:p14="http://schemas.microsoft.com/office/powerpoint/2010/main" val="1677865805"/>
       </p:ext>
     </p:extLst>
   </p:cSld>
@@ -5110,7 +5278,7 @@
         </p:nvSpPr>
         <p:spPr>
           <a:xfrm>
-            <a:off x="3048000" y="3429000"/>
+            <a:off x="2939474" y="6204804"/>
             <a:ext cx="6096000" cy="369332"/>
           </a:xfrm>
           <a:prstGeom prst="rect">
@@ -5124,21 +5292,20 @@
           </a:bodyPr>
           <a:lstStyle/>
           <a:p>
-            <a:pPr>
+            <a:pPr algn="ctr">
               <a:spcAft>
                 <a:spcPts val="600"/>
               </a:spcAft>
             </a:pPr>
             <a:r>
-              <a:rPr lang="it-IT" dirty="0"/>
-              <a:t>[1] Julia Documentation: https://docs.julialang.org/en/v1/ </a:t>
-            </a:r>
-            <a:endParaRPr lang="ru-RU" sz="1800" i="1" dirty="0">
-              <a:effectLst/>
-              <a:latin typeface="Cambria" panose="02040503050406030204" pitchFamily="18" charset="0"/>
-              <a:ea typeface="Cambria" panose="02040503050406030204" pitchFamily="18" charset="0"/>
-              <a:cs typeface="Times New Roman" panose="02020603050405020304" pitchFamily="18" charset="0"/>
-            </a:endParaRPr>
+              <a:rPr lang="ru-RU" sz="1800" i="1" dirty="0">
+                <a:effectLst/>
+                <a:latin typeface="Cambria" panose="02040503050406030204" pitchFamily="18" charset="0"/>
+                <a:ea typeface="Cambria" panose="02040503050406030204" pitchFamily="18" charset="0"/>
+                <a:cs typeface="Times New Roman" panose="02020603050405020304" pitchFamily="18" charset="0"/>
+              </a:rPr>
+              <a:t>Рис. 17: Задание 5. План приготовления кофе</a:t>
+            </a:r>
           </a:p>
         </p:txBody>
       </p:sp>
@@ -5172,15 +5339,180 @@
           <a:p>
             <a:r>
               <a:rPr lang="ru-RU" dirty="0"/>
-              <a:t>Список литературы. Библиография </a:t>
-            </a:r>
-          </a:p>
-        </p:txBody>
-      </p:sp>
+              <a:t>Выполнение лабораторной работы</a:t>
+            </a:r>
+          </a:p>
+        </p:txBody>
+      </p:sp>
+      <p:pic>
+        <p:nvPicPr>
+          <p:cNvPr id="4" name="Рисунок 3">
+            <a:extLst>
+              <a:ext uri="{FF2B5EF4-FFF2-40B4-BE49-F238E27FC236}">
+                <a16:creationId xmlns:a16="http://schemas.microsoft.com/office/drawing/2014/main" id="{7972FF71-AC40-4145-BFC7-242A1A1344FE}"/>
+              </a:ext>
+            </a:extLst>
+          </p:cNvPr>
+          <p:cNvPicPr>
+            <a:picLocks noChangeAspect="1"/>
+          </p:cNvPicPr>
+          <p:nvPr/>
+        </p:nvPicPr>
+        <p:blipFill>
+          <a:blip r:embed="rId3"/>
+          <a:stretch>
+            <a:fillRect/>
+          </a:stretch>
+        </p:blipFill>
+        <p:spPr>
+          <a:xfrm>
+            <a:off x="3169228" y="1210673"/>
+            <a:ext cx="5636492" cy="4973376"/>
+          </a:xfrm>
+          <a:prstGeom prst="rect">
+            <a:avLst/>
+          </a:prstGeom>
+        </p:spPr>
+      </p:pic>
     </p:spTree>
     <p:extLst>
       <p:ext uri="{BB962C8B-B14F-4D97-AF65-F5344CB8AC3E}">
-        <p14:creationId xmlns:p14="http://schemas.microsoft.com/office/powerpoint/2010/main" val="2703444440"/>
+        <p14:creationId xmlns:p14="http://schemas.microsoft.com/office/powerpoint/2010/main" val="2974289223"/>
+      </p:ext>
+    </p:extLst>
+  </p:cSld>
+  <p:clrMapOvr>
+    <a:masterClrMapping/>
+  </p:clrMapOvr>
+  <mc:AlternateContent xmlns:mc="http://schemas.openxmlformats.org/markup-compatibility/2006" xmlns:p14="http://schemas.microsoft.com/office/powerpoint/2010/main">
+    <mc:Choice Requires="p14">
+      <p:transition p14:dur="10"/>
+    </mc:Choice>
+    <mc:Fallback xmlns="">
+      <p:transition/>
+    </mc:Fallback>
+  </mc:AlternateContent>
+</p:sld>
+</file>
+
+<file path=ppt/slides/slide19.xml><?xml version="1.0" encoding="utf-8"?>
+<p:sld xmlns:a="http://schemas.openxmlformats.org/drawingml/2006/main" xmlns:r="http://schemas.openxmlformats.org/officeDocument/2006/relationships" xmlns:p="http://schemas.openxmlformats.org/presentationml/2006/main">
+  <p:cSld>
+    <p:spTree>
+      <p:nvGrpSpPr>
+        <p:cNvPr id="1" name=""/>
+        <p:cNvGrpSpPr/>
+        <p:nvPr/>
+      </p:nvGrpSpPr>
+      <p:grpSpPr>
+        <a:xfrm>
+          <a:off x="0" y="0"/>
+          <a:ext cx="0" cy="0"/>
+          <a:chOff x="0" y="0"/>
+          <a:chExt cx="0" cy="0"/>
+        </a:xfrm>
+      </p:grpSpPr>
+      <p:sp>
+        <p:nvSpPr>
+          <p:cNvPr id="5" name="TextBox 4">
+            <a:extLst>
+              <a:ext uri="{FF2B5EF4-FFF2-40B4-BE49-F238E27FC236}">
+                <a16:creationId xmlns:a16="http://schemas.microsoft.com/office/drawing/2014/main" id="{CDED26EF-06FE-4E73-823D-459E0FACC06E}"/>
+              </a:ext>
+            </a:extLst>
+          </p:cNvPr>
+          <p:cNvSpPr txBox="1"/>
+          <p:nvPr/>
+        </p:nvSpPr>
+        <p:spPr>
+          <a:xfrm>
+            <a:off x="3048000" y="2879375"/>
+            <a:ext cx="6096000" cy="923330"/>
+          </a:xfrm>
+          <a:prstGeom prst="rect">
+            <a:avLst/>
+          </a:prstGeom>
+          <a:noFill/>
+        </p:spPr>
+        <p:txBody>
+          <a:bodyPr wrap="square">
+            <a:spAutoFit/>
+          </a:bodyPr>
+          <a:lstStyle/>
+          <a:p>
+            <a:pPr>
+              <a:spcAft>
+                <a:spcPts val="600"/>
+              </a:spcAft>
+            </a:pPr>
+            <a:r>
+              <a:rPr lang="ru-RU" dirty="0"/>
+              <a:t>• В результате выполнения данной лабораторной работы я </a:t>
+            </a:r>
+            <a:r>
+              <a:rPr lang="ru-RU" dirty="0" err="1"/>
+              <a:t>оосвоила</a:t>
+            </a:r>
+            <a:r>
+              <a:rPr lang="ru-RU" dirty="0"/>
+              <a:t> пакеты </a:t>
+            </a:r>
+            <a:r>
+              <a:rPr lang="ru-RU" dirty="0" err="1"/>
+              <a:t>Julia</a:t>
+            </a:r>
+            <a:r>
+              <a:rPr lang="ru-RU" dirty="0"/>
+              <a:t> для решения задач оптимизации.</a:t>
+            </a:r>
+            <a:endParaRPr lang="ru-RU" sz="1800" i="1" dirty="0">
+              <a:effectLst/>
+              <a:latin typeface="Cambria" panose="02040503050406030204" pitchFamily="18" charset="0"/>
+              <a:ea typeface="Cambria" panose="02040503050406030204" pitchFamily="18" charset="0"/>
+              <a:cs typeface="Times New Roman" panose="02020603050405020304" pitchFamily="18" charset="0"/>
+            </a:endParaRPr>
+          </a:p>
+        </p:txBody>
+      </p:sp>
+      <p:sp>
+        <p:nvSpPr>
+          <p:cNvPr id="6" name="TextBox 5">
+            <a:extLst>
+              <a:ext uri="{FF2B5EF4-FFF2-40B4-BE49-F238E27FC236}">
+                <a16:creationId xmlns:a16="http://schemas.microsoft.com/office/drawing/2014/main" id="{AEECEA28-1411-418B-A719-32D49171B868}"/>
+              </a:ext>
+            </a:extLst>
+          </p:cNvPr>
+          <p:cNvSpPr txBox="1"/>
+          <p:nvPr/>
+        </p:nvSpPr>
+        <p:spPr>
+          <a:xfrm>
+            <a:off x="609600" y="755357"/>
+            <a:ext cx="6096000" cy="369332"/>
+          </a:xfrm>
+          <a:prstGeom prst="rect">
+            <a:avLst/>
+          </a:prstGeom>
+          <a:noFill/>
+        </p:spPr>
+        <p:txBody>
+          <a:bodyPr wrap="square">
+            <a:spAutoFit/>
+          </a:bodyPr>
+          <a:lstStyle/>
+          <a:p>
+            <a:r>
+              <a:rPr lang="ru-RU" dirty="0"/>
+              <a:t>Вывод</a:t>
+            </a:r>
+          </a:p>
+        </p:txBody>
+      </p:sp>
+    </p:spTree>
+    <p:extLst>
+      <p:ext uri="{BB962C8B-B14F-4D97-AF65-F5344CB8AC3E}">
+        <p14:creationId xmlns:p14="http://schemas.microsoft.com/office/powerpoint/2010/main" val="74012788"/>
       </p:ext>
     </p:extLst>
   </p:cSld>
@@ -5215,12 +5547,92 @@
           <a:chExt cx="0" cy="0"/>
         </a:xfrm>
       </p:grpSpPr>
+      <p:sp>
+        <p:nvSpPr>
+          <p:cNvPr id="5" name="TextBox 4">
+            <a:extLst>
+              <a:ext uri="{FF2B5EF4-FFF2-40B4-BE49-F238E27FC236}">
+                <a16:creationId xmlns:a16="http://schemas.microsoft.com/office/drawing/2014/main" id="{210F444B-6F8E-4412-80EA-C6825E25DB35}"/>
+              </a:ext>
+            </a:extLst>
+          </p:cNvPr>
+          <p:cNvSpPr txBox="1"/>
+          <p:nvPr/>
+        </p:nvSpPr>
+        <p:spPr>
+          <a:xfrm>
+            <a:off x="3033302" y="6096363"/>
+            <a:ext cx="6096000" cy="369332"/>
+          </a:xfrm>
+          <a:prstGeom prst="rect">
+            <a:avLst/>
+          </a:prstGeom>
+          <a:noFill/>
+        </p:spPr>
+        <p:txBody>
+          <a:bodyPr wrap="square">
+            <a:spAutoFit/>
+          </a:bodyPr>
+          <a:lstStyle/>
+          <a:p>
+            <a:pPr algn="ctr">
+              <a:spcAft>
+                <a:spcPts val="600"/>
+              </a:spcAft>
+            </a:pPr>
+            <a:r>
+              <a:rPr lang="ru-RU" sz="1800" i="1" dirty="0">
+                <a:effectLst/>
+                <a:latin typeface="Cambria" panose="02040503050406030204" pitchFamily="18" charset="0"/>
+                <a:ea typeface="Cambria" panose="02040503050406030204" pitchFamily="18" charset="0"/>
+                <a:cs typeface="Times New Roman" panose="02020603050405020304" pitchFamily="18" charset="0"/>
+              </a:rPr>
+              <a:t>Рис. 1: Линейное программирование</a:t>
+            </a:r>
+          </a:p>
+        </p:txBody>
+      </p:sp>
+      <p:sp>
+        <p:nvSpPr>
+          <p:cNvPr id="7" name="TextBox 6">
+            <a:extLst>
+              <a:ext uri="{FF2B5EF4-FFF2-40B4-BE49-F238E27FC236}">
+                <a16:creationId xmlns:a16="http://schemas.microsoft.com/office/drawing/2014/main" id="{B81B8770-F47A-4CCB-ABCE-E5982004E697}"/>
+              </a:ext>
+            </a:extLst>
+          </p:cNvPr>
+          <p:cNvSpPr txBox="1"/>
+          <p:nvPr/>
+        </p:nvSpPr>
+        <p:spPr>
+          <a:xfrm>
+            <a:off x="513347" y="761637"/>
+            <a:ext cx="6096000" cy="369332"/>
+          </a:xfrm>
+          <a:prstGeom prst="rect">
+            <a:avLst/>
+          </a:prstGeom>
+          <a:noFill/>
+        </p:spPr>
+        <p:txBody>
+          <a:bodyPr wrap="square">
+            <a:spAutoFit/>
+          </a:bodyPr>
+          <a:lstStyle/>
+          <a:p>
+            <a:r>
+              <a:rPr lang="ru-RU" dirty="0"/>
+              <a:t>Выполнение лабораторной работы</a:t>
+            </a:r>
+          </a:p>
+        </p:txBody>
+      </p:sp>
       <p:pic>
         <p:nvPicPr>
-          <p:cNvPr id="3" name="Рисунок 2">
+          <p:cNvPr id="4" name="Рисунок 3">
             <a:extLst>
               <a:ext uri="{FF2B5EF4-FFF2-40B4-BE49-F238E27FC236}">
-                <a16:creationId xmlns:a16="http://schemas.microsoft.com/office/drawing/2014/main" id="{5384CBF6-7AD2-40EE-94EF-87D2FB50FA53}"/>
+                <a16:creationId xmlns:a16="http://schemas.microsoft.com/office/drawing/2014/main" id="{D2AA58ED-D2EE-480A-B6F6-556220D77E4B}"/>
               </a:ext>
             </a:extLst>
           </p:cNvPr>
@@ -5237,20 +5649,58 @@
         </p:blipFill>
         <p:spPr>
           <a:xfrm>
-            <a:off x="1542414" y="2066735"/>
-            <a:ext cx="9107171" cy="2724530"/>
+            <a:off x="2824348" y="1258783"/>
+            <a:ext cx="6543303" cy="4837579"/>
           </a:xfrm>
           <a:prstGeom prst="rect">
             <a:avLst/>
           </a:prstGeom>
         </p:spPr>
       </p:pic>
+    </p:spTree>
+    <p:extLst>
+      <p:ext uri="{BB962C8B-B14F-4D97-AF65-F5344CB8AC3E}">
+        <p14:creationId xmlns:p14="http://schemas.microsoft.com/office/powerpoint/2010/main" val="1479414558"/>
+      </p:ext>
+    </p:extLst>
+  </p:cSld>
+  <p:clrMapOvr>
+    <a:masterClrMapping/>
+  </p:clrMapOvr>
+  <mc:AlternateContent xmlns:mc="http://schemas.openxmlformats.org/markup-compatibility/2006" xmlns:p14="http://schemas.microsoft.com/office/powerpoint/2010/main">
+    <mc:Choice Requires="p14">
+      <p:transition p14:dur="10"/>
+    </mc:Choice>
+    <mc:Fallback xmlns="">
+      <p:transition/>
+    </mc:Fallback>
+  </mc:AlternateContent>
+</p:sld>
+</file>
+
+<file path=ppt/slides/slide20.xml><?xml version="1.0" encoding="utf-8"?>
+<p:sld xmlns:a="http://schemas.openxmlformats.org/drawingml/2006/main" xmlns:r="http://schemas.openxmlformats.org/officeDocument/2006/relationships" xmlns:p="http://schemas.openxmlformats.org/presentationml/2006/main">
+  <p:cSld>
+    <p:spTree>
+      <p:nvGrpSpPr>
+        <p:cNvPr id="1" name=""/>
+        <p:cNvGrpSpPr/>
+        <p:nvPr/>
+      </p:nvGrpSpPr>
+      <p:grpSpPr>
+        <a:xfrm>
+          <a:off x="0" y="0"/>
+          <a:ext cx="0" cy="0"/>
+          <a:chOff x="0" y="0"/>
+          <a:chExt cx="0" cy="0"/>
+        </a:xfrm>
+      </p:grpSpPr>
       <p:sp>
         <p:nvSpPr>
           <p:cNvPr id="5" name="TextBox 4">
             <a:extLst>
               <a:ext uri="{FF2B5EF4-FFF2-40B4-BE49-F238E27FC236}">
-                <a16:creationId xmlns:a16="http://schemas.microsoft.com/office/drawing/2014/main" id="{210F444B-6F8E-4412-80EA-C6825E25DB35}"/>
+                <a16:creationId xmlns:a16="http://schemas.microsoft.com/office/drawing/2014/main" id="{CDED26EF-06FE-4E73-823D-459E0FACC06E}"/>
               </a:ext>
             </a:extLst>
           </p:cNvPr>
@@ -5259,8 +5709,8 @@
         </p:nvSpPr>
         <p:spPr>
           <a:xfrm>
-            <a:off x="3047999" y="5542365"/>
-            <a:ext cx="6096000" cy="369332"/>
+            <a:off x="3048000" y="3429000"/>
+            <a:ext cx="6096000" cy="2108269"/>
           </a:xfrm>
           <a:prstGeom prst="rect">
             <a:avLst/>
@@ -5273,44 +5723,93 @@
           </a:bodyPr>
           <a:lstStyle/>
           <a:p>
-            <a:pPr>
+            <a:pPr marL="342900" indent="-342900">
               <a:spcAft>
                 <a:spcPts val="600"/>
               </a:spcAft>
+              <a:buAutoNum type="arabicPeriod"/>
             </a:pPr>
+            <a:r>
+              <a:rPr lang="it-IT" dirty="0">
+                <a:cs typeface="Arial" panose="020B0604020202020204" pitchFamily="34" charset="0"/>
+              </a:rPr>
+              <a:t>JuliaLang [</a:t>
+            </a:r>
+            <a:r>
+              <a:rPr lang="ru-RU" dirty="0">
+                <a:cs typeface="Arial" panose="020B0604020202020204" pitchFamily="34" charset="0"/>
+              </a:rPr>
+              <a:t>Электронный ресурс]. 2024 </a:t>
+            </a:r>
+            <a:r>
+              <a:rPr lang="it-IT" dirty="0">
+                <a:cs typeface="Arial" panose="020B0604020202020204" pitchFamily="34" charset="0"/>
+              </a:rPr>
+              <a:t>JuliaLang.org contributors. URL:https://julialang.org/(</a:t>
+            </a:r>
+            <a:r>
+              <a:rPr lang="ru-RU" dirty="0">
+                <a:cs typeface="Arial" panose="020B0604020202020204" pitchFamily="34" charset="0"/>
+              </a:rPr>
+              <a:t>дата обращения: 11.10.2024).</a:t>
+            </a:r>
+          </a:p>
+          <a:p>
+            <a:pPr marL="342900" indent="-342900">
+              <a:spcAft>
+                <a:spcPts val="600"/>
+              </a:spcAft>
+              <a:buAutoNum type="arabicPeriod"/>
+            </a:pPr>
+            <a:r>
+              <a:rPr lang="en-US" sz="1800" i="1" dirty="0">
+                <a:effectLst/>
+                <a:ea typeface="Cambria" panose="02040503050406030204" pitchFamily="18" charset="0"/>
+                <a:cs typeface="Arial" panose="020B0604020202020204" pitchFamily="34" charset="0"/>
+              </a:rPr>
+              <a:t>Julia  1.11  Documentation  [</a:t>
+            </a:r>
             <a:r>
               <a:rPr lang="ru-RU" sz="1800" i="1" dirty="0">
                 <a:effectLst/>
-                <a:latin typeface="Cambria" panose="02040503050406030204" pitchFamily="18" charset="0"/>
                 <a:ea typeface="Cambria" panose="02040503050406030204" pitchFamily="18" charset="0"/>
-                <a:cs typeface="Times New Roman" panose="02020603050405020304" pitchFamily="18" charset="0"/>
+                <a:cs typeface="Arial" panose="020B0604020202020204" pitchFamily="34" charset="0"/>
               </a:rPr>
-              <a:t>Рис. 1: Установка менеджера пакетов </a:t>
-            </a:r>
-            <a:r>
-              <a:rPr lang="ru-RU" sz="1800" i="1" dirty="0" err="1">
+              <a:t>Электронный  ресурс].  2024  </a:t>
+            </a:r>
+            <a:r>
+              <a:rPr lang="en-US" sz="1800" i="1" dirty="0" err="1">
                 <a:effectLst/>
-                <a:latin typeface="Cambria" panose="02040503050406030204" pitchFamily="18" charset="0"/>
                 <a:ea typeface="Cambria" panose="02040503050406030204" pitchFamily="18" charset="0"/>
-                <a:cs typeface="Times New Roman" panose="02020603050405020304" pitchFamily="18" charset="0"/>
+                <a:cs typeface="Arial" panose="020B0604020202020204" pitchFamily="34" charset="0"/>
               </a:rPr>
-              <a:t>Chocolatey</a:t>
-            </a:r>
-            <a:endParaRPr lang="ru-RU" sz="1800" i="1" dirty="0">
-              <a:effectLst/>
-              <a:latin typeface="Cambria" panose="02040503050406030204" pitchFamily="18" charset="0"/>
-              <a:ea typeface="Cambria" panose="02040503050406030204" pitchFamily="18" charset="0"/>
-              <a:cs typeface="Times New Roman" panose="02020603050405020304" pitchFamily="18" charset="0"/>
-            </a:endParaRPr>
-          </a:p>
-        </p:txBody>
-      </p:sp>
-      <p:sp>
-        <p:nvSpPr>
-          <p:cNvPr id="7" name="TextBox 6">
+              <a:t>JuliaLang.orgcontributors</a:t>
+            </a:r>
+            <a:r>
+              <a:rPr lang="en-US" sz="1800" i="1" dirty="0">
+                <a:effectLst/>
+                <a:ea typeface="Cambria" panose="02040503050406030204" pitchFamily="18" charset="0"/>
+                <a:cs typeface="Arial" panose="020B0604020202020204" pitchFamily="34" charset="0"/>
+              </a:rPr>
+              <a:t>. URL:https://docs.julialang.org/en/v1/(</a:t>
+            </a:r>
+            <a:r>
+              <a:rPr lang="ru-RU" sz="1800" i="1" dirty="0">
+                <a:effectLst/>
+                <a:ea typeface="Cambria" panose="02040503050406030204" pitchFamily="18" charset="0"/>
+                <a:cs typeface="Arial" panose="020B0604020202020204" pitchFamily="34" charset="0"/>
+              </a:rPr>
+              <a:t>дата обращения:11.10.2024).</a:t>
+            </a:r>
+          </a:p>
+        </p:txBody>
+      </p:sp>
+      <p:sp>
+        <p:nvSpPr>
+          <p:cNvPr id="6" name="TextBox 5">
             <a:extLst>
               <a:ext uri="{FF2B5EF4-FFF2-40B4-BE49-F238E27FC236}">
-                <a16:creationId xmlns:a16="http://schemas.microsoft.com/office/drawing/2014/main" id="{B81B8770-F47A-4CCB-ABCE-E5982004E697}"/>
+                <a16:creationId xmlns:a16="http://schemas.microsoft.com/office/drawing/2014/main" id="{AEECEA28-1411-418B-A719-32D49171B868}"/>
               </a:ext>
             </a:extLst>
           </p:cNvPr>
@@ -5319,7 +5818,7 @@
         </p:nvSpPr>
         <p:spPr>
           <a:xfrm>
-            <a:off x="513347" y="761637"/>
+            <a:off x="609600" y="755357"/>
             <a:ext cx="6096000" cy="369332"/>
           </a:xfrm>
           <a:prstGeom prst="rect">
@@ -5335,7 +5834,7 @@
           <a:p>
             <a:r>
               <a:rPr lang="ru-RU" dirty="0"/>
-              <a:t>Установка необходимых приложений </a:t>
+              <a:t>Список литературы. Библиография </a:t>
             </a:r>
           </a:p>
         </p:txBody>
@@ -5343,7 +5842,7 @@
     </p:spTree>
     <p:extLst>
       <p:ext uri="{BB962C8B-B14F-4D97-AF65-F5344CB8AC3E}">
-        <p14:creationId xmlns:p14="http://schemas.microsoft.com/office/powerpoint/2010/main" val="1479414558"/>
+        <p14:creationId xmlns:p14="http://schemas.microsoft.com/office/powerpoint/2010/main" val="2703444440"/>
       </p:ext>
     </p:extLst>
   </p:cSld>
@@ -5378,12 +5877,92 @@
           <a:chExt cx="0" cy="0"/>
         </a:xfrm>
       </p:grpSpPr>
+      <p:sp>
+        <p:nvSpPr>
+          <p:cNvPr id="5" name="TextBox 4">
+            <a:extLst>
+              <a:ext uri="{FF2B5EF4-FFF2-40B4-BE49-F238E27FC236}">
+                <a16:creationId xmlns:a16="http://schemas.microsoft.com/office/drawing/2014/main" id="{F61EECBD-DB10-46B1-85C1-99CC47474C69}"/>
+              </a:ext>
+            </a:extLst>
+          </p:cNvPr>
+          <p:cNvSpPr txBox="1"/>
+          <p:nvPr/>
+        </p:nvSpPr>
+        <p:spPr>
+          <a:xfrm>
+            <a:off x="1480492" y="6210509"/>
+            <a:ext cx="9231013" cy="369332"/>
+          </a:xfrm>
+          <a:prstGeom prst="rect">
+            <a:avLst/>
+          </a:prstGeom>
+          <a:noFill/>
+        </p:spPr>
+        <p:txBody>
+          <a:bodyPr wrap="square">
+            <a:spAutoFit/>
+          </a:bodyPr>
+          <a:lstStyle/>
+          <a:p>
+            <a:pPr algn="ctr">
+              <a:spcAft>
+                <a:spcPts val="600"/>
+              </a:spcAft>
+            </a:pPr>
+            <a:r>
+              <a:rPr lang="ru-RU" sz="1800" i="1" dirty="0">
+                <a:effectLst/>
+                <a:latin typeface="Cambria" panose="02040503050406030204" pitchFamily="18" charset="0"/>
+                <a:ea typeface="Cambria" panose="02040503050406030204" pitchFamily="18" charset="0"/>
+                <a:cs typeface="Times New Roman" panose="02020603050405020304" pitchFamily="18" charset="0"/>
+              </a:rPr>
+              <a:t>Рис. 2: Векторизованные ограничения и целевая функция оптимизации</a:t>
+            </a:r>
+          </a:p>
+        </p:txBody>
+      </p:sp>
+      <p:sp>
+        <p:nvSpPr>
+          <p:cNvPr id="6" name="TextBox 5">
+            <a:extLst>
+              <a:ext uri="{FF2B5EF4-FFF2-40B4-BE49-F238E27FC236}">
+                <a16:creationId xmlns:a16="http://schemas.microsoft.com/office/drawing/2014/main" id="{FA99E092-5F30-44AE-94A3-72F12665EEDA}"/>
+              </a:ext>
+            </a:extLst>
+          </p:cNvPr>
+          <p:cNvSpPr txBox="1"/>
+          <p:nvPr/>
+        </p:nvSpPr>
+        <p:spPr>
+          <a:xfrm>
+            <a:off x="513347" y="761637"/>
+            <a:ext cx="6096000" cy="369332"/>
+          </a:xfrm>
+          <a:prstGeom prst="rect">
+            <a:avLst/>
+          </a:prstGeom>
+          <a:noFill/>
+        </p:spPr>
+        <p:txBody>
+          <a:bodyPr wrap="square">
+            <a:spAutoFit/>
+          </a:bodyPr>
+          <a:lstStyle/>
+          <a:p>
+            <a:r>
+              <a:rPr lang="ru-RU" dirty="0"/>
+              <a:t>Установка необходимых приложений </a:t>
+            </a:r>
+          </a:p>
+        </p:txBody>
+      </p:sp>
       <p:pic>
         <p:nvPicPr>
-          <p:cNvPr id="3" name="Рисунок 2">
+          <p:cNvPr id="4" name="Рисунок 3">
             <a:extLst>
               <a:ext uri="{FF2B5EF4-FFF2-40B4-BE49-F238E27FC236}">
-                <a16:creationId xmlns:a16="http://schemas.microsoft.com/office/drawing/2014/main" id="{8ADC0EFB-98ED-40F4-8634-4C8774B08AC1}"/>
+                <a16:creationId xmlns:a16="http://schemas.microsoft.com/office/drawing/2014/main" id="{E7E7F37C-314C-4D7E-83A2-A0429B70D1CB}"/>
               </a:ext>
             </a:extLst>
           </p:cNvPr>
@@ -5400,94 +5979,14 @@
         </p:blipFill>
         <p:spPr>
           <a:xfrm>
-            <a:off x="1480493" y="1533260"/>
-            <a:ext cx="9231013" cy="3791479"/>
+            <a:off x="3491296" y="1257945"/>
+            <a:ext cx="5209404" cy="5047567"/>
           </a:xfrm>
           <a:prstGeom prst="rect">
             <a:avLst/>
           </a:prstGeom>
         </p:spPr>
       </p:pic>
-      <p:sp>
-        <p:nvSpPr>
-          <p:cNvPr id="5" name="TextBox 4">
-            <a:extLst>
-              <a:ext uri="{FF2B5EF4-FFF2-40B4-BE49-F238E27FC236}">
-                <a16:creationId xmlns:a16="http://schemas.microsoft.com/office/drawing/2014/main" id="{F61EECBD-DB10-46B1-85C1-99CC47474C69}"/>
-              </a:ext>
-            </a:extLst>
-          </p:cNvPr>
-          <p:cNvSpPr txBox="1"/>
-          <p:nvPr/>
-        </p:nvSpPr>
-        <p:spPr>
-          <a:xfrm>
-            <a:off x="4615506" y="5782997"/>
-            <a:ext cx="6096000" cy="369332"/>
-          </a:xfrm>
-          <a:prstGeom prst="rect">
-            <a:avLst/>
-          </a:prstGeom>
-          <a:noFill/>
-        </p:spPr>
-        <p:txBody>
-          <a:bodyPr wrap="square">
-            <a:spAutoFit/>
-          </a:bodyPr>
-          <a:lstStyle/>
-          <a:p>
-            <a:pPr>
-              <a:spcAft>
-                <a:spcPts val="600"/>
-              </a:spcAft>
-            </a:pPr>
-            <a:r>
-              <a:rPr lang="ru-RU" sz="1800" i="1" dirty="0">
-                <a:effectLst/>
-                <a:latin typeface="Cambria" panose="02040503050406030204" pitchFamily="18" charset="0"/>
-                <a:ea typeface="Cambria" panose="02040503050406030204" pitchFamily="18" charset="0"/>
-                <a:cs typeface="Times New Roman" panose="02020603050405020304" pitchFamily="18" charset="0"/>
-              </a:rPr>
-              <a:t>Рис. 2: Установка Far Manager</a:t>
-            </a:r>
-          </a:p>
-        </p:txBody>
-      </p:sp>
-      <p:sp>
-        <p:nvSpPr>
-          <p:cNvPr id="6" name="TextBox 5">
-            <a:extLst>
-              <a:ext uri="{FF2B5EF4-FFF2-40B4-BE49-F238E27FC236}">
-                <a16:creationId xmlns:a16="http://schemas.microsoft.com/office/drawing/2014/main" id="{FA99E092-5F30-44AE-94A3-72F12665EEDA}"/>
-              </a:ext>
-            </a:extLst>
-          </p:cNvPr>
-          <p:cNvSpPr txBox="1"/>
-          <p:nvPr/>
-        </p:nvSpPr>
-        <p:spPr>
-          <a:xfrm>
-            <a:off x="513347" y="761637"/>
-            <a:ext cx="6096000" cy="369332"/>
-          </a:xfrm>
-          <a:prstGeom prst="rect">
-            <a:avLst/>
-          </a:prstGeom>
-          <a:noFill/>
-        </p:spPr>
-        <p:txBody>
-          <a:bodyPr wrap="square">
-            <a:spAutoFit/>
-          </a:bodyPr>
-          <a:lstStyle/>
-          <a:p>
-            <a:r>
-              <a:rPr lang="ru-RU" dirty="0"/>
-              <a:t>Установка необходимых приложений </a:t>
-            </a:r>
-          </a:p>
-        </p:txBody>
-      </p:sp>
     </p:spTree>
     <p:extLst>
       <p:ext uri="{BB962C8B-B14F-4D97-AF65-F5344CB8AC3E}">
@@ -5526,12 +6025,92 @@
           <a:chExt cx="0" cy="0"/>
         </a:xfrm>
       </p:grpSpPr>
+      <p:sp>
+        <p:nvSpPr>
+          <p:cNvPr id="5" name="TextBox 4">
+            <a:extLst>
+              <a:ext uri="{FF2B5EF4-FFF2-40B4-BE49-F238E27FC236}">
+                <a16:creationId xmlns:a16="http://schemas.microsoft.com/office/drawing/2014/main" id="{2701994F-E53B-40F4-A46F-33FD0C7A24F9}"/>
+              </a:ext>
+            </a:extLst>
+          </p:cNvPr>
+          <p:cNvSpPr txBox="1"/>
+          <p:nvPr/>
+        </p:nvSpPr>
+        <p:spPr>
+          <a:xfrm>
+            <a:off x="1856783" y="6240377"/>
+            <a:ext cx="8478433" cy="369332"/>
+          </a:xfrm>
+          <a:prstGeom prst="rect">
+            <a:avLst/>
+          </a:prstGeom>
+          <a:noFill/>
+        </p:spPr>
+        <p:txBody>
+          <a:bodyPr wrap="square">
+            <a:spAutoFit/>
+          </a:bodyPr>
+          <a:lstStyle/>
+          <a:p>
+            <a:pPr algn="ctr">
+              <a:spcAft>
+                <a:spcPts val="600"/>
+              </a:spcAft>
+            </a:pPr>
+            <a:r>
+              <a:rPr lang="ru-RU" sz="1800" i="1" dirty="0">
+                <a:effectLst/>
+                <a:latin typeface="Cambria" panose="02040503050406030204" pitchFamily="18" charset="0"/>
+                <a:ea typeface="Cambria" panose="02040503050406030204" pitchFamily="18" charset="0"/>
+                <a:cs typeface="Times New Roman" panose="02020603050405020304" pitchFamily="18" charset="0"/>
+              </a:rPr>
+              <a:t>Рис. 3: Оптимизация рациона питания</a:t>
+            </a:r>
+          </a:p>
+        </p:txBody>
+      </p:sp>
+      <p:sp>
+        <p:nvSpPr>
+          <p:cNvPr id="6" name="TextBox 5">
+            <a:extLst>
+              <a:ext uri="{FF2B5EF4-FFF2-40B4-BE49-F238E27FC236}">
+                <a16:creationId xmlns:a16="http://schemas.microsoft.com/office/drawing/2014/main" id="{FC062665-87C2-4D63-B7F4-5761E6B144A4}"/>
+              </a:ext>
+            </a:extLst>
+          </p:cNvPr>
+          <p:cNvSpPr txBox="1"/>
+          <p:nvPr/>
+        </p:nvSpPr>
+        <p:spPr>
+          <a:xfrm>
+            <a:off x="513347" y="761637"/>
+            <a:ext cx="6096000" cy="369332"/>
+          </a:xfrm>
+          <a:prstGeom prst="rect">
+            <a:avLst/>
+          </a:prstGeom>
+          <a:noFill/>
+        </p:spPr>
+        <p:txBody>
+          <a:bodyPr wrap="square">
+            <a:spAutoFit/>
+          </a:bodyPr>
+          <a:lstStyle/>
+          <a:p>
+            <a:r>
+              <a:rPr lang="ru-RU" dirty="0"/>
+              <a:t>Выполнение лабораторной работы</a:t>
+            </a:r>
+          </a:p>
+        </p:txBody>
+      </p:sp>
       <p:pic>
         <p:nvPicPr>
-          <p:cNvPr id="3" name="Рисунок 2">
+          <p:cNvPr id="4" name="Рисунок 3">
             <a:extLst>
               <a:ext uri="{FF2B5EF4-FFF2-40B4-BE49-F238E27FC236}">
-                <a16:creationId xmlns:a16="http://schemas.microsoft.com/office/drawing/2014/main" id="{FD7B85BD-C0A3-4280-8E66-8F706681D3E8}"/>
+                <a16:creationId xmlns:a16="http://schemas.microsoft.com/office/drawing/2014/main" id="{4377DBFC-0E2F-4C68-A375-34E16D0ADAF6}"/>
               </a:ext>
             </a:extLst>
           </p:cNvPr>
@@ -5548,112 +6127,14 @@
         </p:blipFill>
         <p:spPr>
           <a:xfrm>
-            <a:off x="1856783" y="1404117"/>
-            <a:ext cx="8478433" cy="4563112"/>
+            <a:off x="3387859" y="1262661"/>
+            <a:ext cx="5416281" cy="4977716"/>
           </a:xfrm>
           <a:prstGeom prst="rect">
             <a:avLst/>
           </a:prstGeom>
         </p:spPr>
       </p:pic>
-      <p:sp>
-        <p:nvSpPr>
-          <p:cNvPr id="5" name="TextBox 4">
-            <a:extLst>
-              <a:ext uri="{FF2B5EF4-FFF2-40B4-BE49-F238E27FC236}">
-                <a16:creationId xmlns:a16="http://schemas.microsoft.com/office/drawing/2014/main" id="{2701994F-E53B-40F4-A46F-33FD0C7A24F9}"/>
-              </a:ext>
-            </a:extLst>
-          </p:cNvPr>
-          <p:cNvSpPr txBox="1"/>
-          <p:nvPr/>
-        </p:nvSpPr>
-        <p:spPr>
-          <a:xfrm>
-            <a:off x="4239216" y="6184049"/>
-            <a:ext cx="6096000" cy="369332"/>
-          </a:xfrm>
-          <a:prstGeom prst="rect">
-            <a:avLst/>
-          </a:prstGeom>
-          <a:noFill/>
-        </p:spPr>
-        <p:txBody>
-          <a:bodyPr wrap="square">
-            <a:spAutoFit/>
-          </a:bodyPr>
-          <a:lstStyle/>
-          <a:p>
-            <a:pPr>
-              <a:spcAft>
-                <a:spcPts val="600"/>
-              </a:spcAft>
-            </a:pPr>
-            <a:r>
-              <a:rPr lang="ru-RU" sz="1800" i="1" dirty="0">
-                <a:effectLst/>
-                <a:latin typeface="Cambria" panose="02040503050406030204" pitchFamily="18" charset="0"/>
-                <a:ea typeface="Cambria" panose="02040503050406030204" pitchFamily="18" charset="0"/>
-                <a:cs typeface="Times New Roman" panose="02020603050405020304" pitchFamily="18" charset="0"/>
-              </a:rPr>
-              <a:t>Рис. 3: Установка </a:t>
-            </a:r>
-            <a:r>
-              <a:rPr lang="ru-RU" sz="1800" i="1" dirty="0" err="1">
-                <a:effectLst/>
-                <a:latin typeface="Cambria" panose="02040503050406030204" pitchFamily="18" charset="0"/>
-                <a:ea typeface="Cambria" panose="02040503050406030204" pitchFamily="18" charset="0"/>
-                <a:cs typeface="Times New Roman" panose="02020603050405020304" pitchFamily="18" charset="0"/>
-              </a:rPr>
-              <a:t>Notepad</a:t>
-            </a:r>
-            <a:r>
-              <a:rPr lang="ru-RU" sz="1800" i="1" dirty="0">
-                <a:effectLst/>
-                <a:latin typeface="Cambria" panose="02040503050406030204" pitchFamily="18" charset="0"/>
-                <a:ea typeface="Cambria" panose="02040503050406030204" pitchFamily="18" charset="0"/>
-                <a:cs typeface="Times New Roman" panose="02020603050405020304" pitchFamily="18" charset="0"/>
-              </a:rPr>
-              <a:t>++</a:t>
-            </a:r>
-          </a:p>
-        </p:txBody>
-      </p:sp>
-      <p:sp>
-        <p:nvSpPr>
-          <p:cNvPr id="6" name="TextBox 5">
-            <a:extLst>
-              <a:ext uri="{FF2B5EF4-FFF2-40B4-BE49-F238E27FC236}">
-                <a16:creationId xmlns:a16="http://schemas.microsoft.com/office/drawing/2014/main" id="{FC062665-87C2-4D63-B7F4-5761E6B144A4}"/>
-              </a:ext>
-            </a:extLst>
-          </p:cNvPr>
-          <p:cNvSpPr txBox="1"/>
-          <p:nvPr/>
-        </p:nvSpPr>
-        <p:spPr>
-          <a:xfrm>
-            <a:off x="513347" y="761637"/>
-            <a:ext cx="6096000" cy="369332"/>
-          </a:xfrm>
-          <a:prstGeom prst="rect">
-            <a:avLst/>
-          </a:prstGeom>
-          <a:noFill/>
-        </p:spPr>
-        <p:txBody>
-          <a:bodyPr wrap="square">
-            <a:spAutoFit/>
-          </a:bodyPr>
-          <a:lstStyle/>
-          <a:p>
-            <a:r>
-              <a:rPr lang="ru-RU" dirty="0"/>
-              <a:t>Установка необходимых приложений </a:t>
-            </a:r>
-          </a:p>
-        </p:txBody>
-      </p:sp>
     </p:spTree>
     <p:extLst>
       <p:ext uri="{BB962C8B-B14F-4D97-AF65-F5344CB8AC3E}">
@@ -5692,12 +6173,92 @@
           <a:chExt cx="0" cy="0"/>
         </a:xfrm>
       </p:grpSpPr>
+      <p:sp>
+        <p:nvSpPr>
+          <p:cNvPr id="5" name="TextBox 4">
+            <a:extLst>
+              <a:ext uri="{FF2B5EF4-FFF2-40B4-BE49-F238E27FC236}">
+                <a16:creationId xmlns:a16="http://schemas.microsoft.com/office/drawing/2014/main" id="{408C1B51-D465-4951-8B4D-A1A796CEEEEA}"/>
+              </a:ext>
+            </a:extLst>
+          </p:cNvPr>
+          <p:cNvSpPr txBox="1"/>
+          <p:nvPr/>
+        </p:nvSpPr>
+        <p:spPr>
+          <a:xfrm>
+            <a:off x="3150015" y="6250221"/>
+            <a:ext cx="6096000" cy="369332"/>
+          </a:xfrm>
+          <a:prstGeom prst="rect">
+            <a:avLst/>
+          </a:prstGeom>
+          <a:noFill/>
+        </p:spPr>
+        <p:txBody>
+          <a:bodyPr wrap="square">
+            <a:spAutoFit/>
+          </a:bodyPr>
+          <a:lstStyle/>
+          <a:p>
+            <a:pPr algn="ctr">
+              <a:spcAft>
+                <a:spcPts val="600"/>
+              </a:spcAft>
+            </a:pPr>
+            <a:r>
+              <a:rPr lang="ru-RU" sz="1800" i="1" dirty="0">
+                <a:effectLst/>
+                <a:latin typeface="Cambria" panose="02040503050406030204" pitchFamily="18" charset="0"/>
+                <a:ea typeface="Cambria" panose="02040503050406030204" pitchFamily="18" charset="0"/>
+                <a:cs typeface="Times New Roman" panose="02020603050405020304" pitchFamily="18" charset="0"/>
+              </a:rPr>
+              <a:t>Рис. 4: Оптимизация рациона питания</a:t>
+            </a:r>
+          </a:p>
+        </p:txBody>
+      </p:sp>
+      <p:sp>
+        <p:nvSpPr>
+          <p:cNvPr id="6" name="TextBox 5">
+            <a:extLst>
+              <a:ext uri="{FF2B5EF4-FFF2-40B4-BE49-F238E27FC236}">
+                <a16:creationId xmlns:a16="http://schemas.microsoft.com/office/drawing/2014/main" id="{7FE4F93A-8129-4032-BC6A-5680793BF223}"/>
+              </a:ext>
+            </a:extLst>
+          </p:cNvPr>
+          <p:cNvSpPr txBox="1"/>
+          <p:nvPr/>
+        </p:nvSpPr>
+        <p:spPr>
+          <a:xfrm>
+            <a:off x="513347" y="761637"/>
+            <a:ext cx="6096000" cy="369332"/>
+          </a:xfrm>
+          <a:prstGeom prst="rect">
+            <a:avLst/>
+          </a:prstGeom>
+          <a:noFill/>
+        </p:spPr>
+        <p:txBody>
+          <a:bodyPr wrap="square">
+            <a:spAutoFit/>
+          </a:bodyPr>
+          <a:lstStyle/>
+          <a:p>
+            <a:r>
+              <a:rPr lang="ru-RU" dirty="0"/>
+              <a:t>Выполнение лабораторной работы</a:t>
+            </a:r>
+          </a:p>
+        </p:txBody>
+      </p:sp>
       <p:pic>
         <p:nvPicPr>
-          <p:cNvPr id="3" name="Рисунок 2">
+          <p:cNvPr id="4" name="Рисунок 3">
             <a:extLst>
               <a:ext uri="{FF2B5EF4-FFF2-40B4-BE49-F238E27FC236}">
-                <a16:creationId xmlns:a16="http://schemas.microsoft.com/office/drawing/2014/main" id="{117DD905-3E7D-4187-A280-0727561F3D3D}"/>
+                <a16:creationId xmlns:a16="http://schemas.microsoft.com/office/drawing/2014/main" id="{253A024B-C889-4123-ABA7-50FB3707C631}"/>
               </a:ext>
             </a:extLst>
           </p:cNvPr>
@@ -5714,109 +6275,14 @@
         </p:blipFill>
         <p:spPr>
           <a:xfrm>
-            <a:off x="3161890" y="2090550"/>
-            <a:ext cx="5868219" cy="2676899"/>
+            <a:off x="3643120" y="1235033"/>
+            <a:ext cx="4905759" cy="5059203"/>
           </a:xfrm>
           <a:prstGeom prst="rect">
             <a:avLst/>
           </a:prstGeom>
         </p:spPr>
       </p:pic>
-      <p:sp>
-        <p:nvSpPr>
-          <p:cNvPr id="5" name="TextBox 4">
-            <a:extLst>
-              <a:ext uri="{FF2B5EF4-FFF2-40B4-BE49-F238E27FC236}">
-                <a16:creationId xmlns:a16="http://schemas.microsoft.com/office/drawing/2014/main" id="{408C1B51-D465-4951-8B4D-A1A796CEEEEA}"/>
-              </a:ext>
-            </a:extLst>
-          </p:cNvPr>
-          <p:cNvSpPr txBox="1"/>
-          <p:nvPr/>
-        </p:nvSpPr>
-        <p:spPr>
-          <a:xfrm>
-            <a:off x="4796590" y="5782996"/>
-            <a:ext cx="6096000" cy="369332"/>
-          </a:xfrm>
-          <a:prstGeom prst="rect">
-            <a:avLst/>
-          </a:prstGeom>
-          <a:noFill/>
-        </p:spPr>
-        <p:txBody>
-          <a:bodyPr wrap="square">
-            <a:spAutoFit/>
-          </a:bodyPr>
-          <a:lstStyle/>
-          <a:p>
-            <a:pPr>
-              <a:spcAft>
-                <a:spcPts val="600"/>
-              </a:spcAft>
-            </a:pPr>
-            <a:r>
-              <a:rPr lang="ru-RU" sz="1800" i="1" dirty="0">
-                <a:effectLst/>
-                <a:latin typeface="Cambria" panose="02040503050406030204" pitchFamily="18" charset="0"/>
-                <a:ea typeface="Cambria" panose="02040503050406030204" pitchFamily="18" charset="0"/>
-                <a:cs typeface="Times New Roman" panose="02020603050405020304" pitchFamily="18" charset="0"/>
-              </a:rPr>
-              <a:t>Рис. 4: Установка </a:t>
-            </a:r>
-            <a:r>
-              <a:rPr lang="ru-RU" sz="1800" i="1" dirty="0" err="1">
-                <a:effectLst/>
-                <a:latin typeface="Cambria" panose="02040503050406030204" pitchFamily="18" charset="0"/>
-                <a:ea typeface="Cambria" panose="02040503050406030204" pitchFamily="18" charset="0"/>
-                <a:cs typeface="Times New Roman" panose="02020603050405020304" pitchFamily="18" charset="0"/>
-              </a:rPr>
-              <a:t>Julia</a:t>
-            </a:r>
-            <a:endParaRPr lang="ru-RU" sz="1800" i="1" dirty="0">
-              <a:effectLst/>
-              <a:latin typeface="Cambria" panose="02040503050406030204" pitchFamily="18" charset="0"/>
-              <a:ea typeface="Cambria" panose="02040503050406030204" pitchFamily="18" charset="0"/>
-              <a:cs typeface="Times New Roman" panose="02020603050405020304" pitchFamily="18" charset="0"/>
-            </a:endParaRPr>
-          </a:p>
-        </p:txBody>
-      </p:sp>
-      <p:sp>
-        <p:nvSpPr>
-          <p:cNvPr id="6" name="TextBox 5">
-            <a:extLst>
-              <a:ext uri="{FF2B5EF4-FFF2-40B4-BE49-F238E27FC236}">
-                <a16:creationId xmlns:a16="http://schemas.microsoft.com/office/drawing/2014/main" id="{7FE4F93A-8129-4032-BC6A-5680793BF223}"/>
-              </a:ext>
-            </a:extLst>
-          </p:cNvPr>
-          <p:cNvSpPr txBox="1"/>
-          <p:nvPr/>
-        </p:nvSpPr>
-        <p:spPr>
-          <a:xfrm>
-            <a:off x="513347" y="761637"/>
-            <a:ext cx="6096000" cy="369332"/>
-          </a:xfrm>
-          <a:prstGeom prst="rect">
-            <a:avLst/>
-          </a:prstGeom>
-          <a:noFill/>
-        </p:spPr>
-        <p:txBody>
-          <a:bodyPr wrap="square">
-            <a:spAutoFit/>
-          </a:bodyPr>
-          <a:lstStyle/>
-          <a:p>
-            <a:r>
-              <a:rPr lang="ru-RU" dirty="0"/>
-              <a:t>Установка необходимых приложений </a:t>
-            </a:r>
-          </a:p>
-        </p:txBody>
-      </p:sp>
     </p:spTree>
     <p:extLst>
       <p:ext uri="{BB962C8B-B14F-4D97-AF65-F5344CB8AC3E}">
@@ -5855,12 +6321,110 @@
           <a:chExt cx="0" cy="0"/>
         </a:xfrm>
       </p:grpSpPr>
+      <p:sp>
+        <p:nvSpPr>
+          <p:cNvPr id="5" name="TextBox 4">
+            <a:extLst>
+              <a:ext uri="{FF2B5EF4-FFF2-40B4-BE49-F238E27FC236}">
+                <a16:creationId xmlns:a16="http://schemas.microsoft.com/office/drawing/2014/main" id="{30BB86DF-19E4-4566-9D61-92137447EDF0}"/>
+              </a:ext>
+            </a:extLst>
+          </p:cNvPr>
+          <p:cNvSpPr txBox="1"/>
+          <p:nvPr/>
+        </p:nvSpPr>
+        <p:spPr>
+          <a:xfrm>
+            <a:off x="3047999" y="6179491"/>
+            <a:ext cx="6096000" cy="369332"/>
+          </a:xfrm>
+          <a:prstGeom prst="rect">
+            <a:avLst/>
+          </a:prstGeom>
+          <a:noFill/>
+        </p:spPr>
+        <p:txBody>
+          <a:bodyPr wrap="square">
+            <a:spAutoFit/>
+          </a:bodyPr>
+          <a:lstStyle/>
+          <a:p>
+            <a:pPr algn="ctr">
+              <a:spcAft>
+                <a:spcPts val="600"/>
+              </a:spcAft>
+            </a:pPr>
+            <a:r>
+              <a:rPr lang="ru-RU" sz="1800" i="1" dirty="0">
+                <a:effectLst/>
+                <a:latin typeface="Cambria" panose="02040503050406030204" pitchFamily="18" charset="0"/>
+                <a:ea typeface="Cambria" panose="02040503050406030204" pitchFamily="18" charset="0"/>
+                <a:cs typeface="Times New Roman" panose="02020603050405020304" pitchFamily="18" charset="0"/>
+              </a:rPr>
+              <a:t>Рис</a:t>
+            </a:r>
+            <a:r>
+              <a:rPr lang="en-US" sz="1800" i="1" dirty="0">
+                <a:effectLst/>
+                <a:latin typeface="Cambria" panose="02040503050406030204" pitchFamily="18" charset="0"/>
+                <a:ea typeface="Cambria" panose="02040503050406030204" pitchFamily="18" charset="0"/>
+                <a:cs typeface="Times New Roman" panose="02020603050405020304" pitchFamily="18" charset="0"/>
+              </a:rPr>
+              <a:t>. 5: </a:t>
+            </a:r>
+            <a:r>
+              <a:rPr lang="ru-RU" sz="1800" i="1" dirty="0">
+                <a:effectLst/>
+                <a:latin typeface="Cambria" panose="02040503050406030204" pitchFamily="18" charset="0"/>
+                <a:ea typeface="Cambria" panose="02040503050406030204" pitchFamily="18" charset="0"/>
+                <a:cs typeface="Times New Roman" panose="02020603050405020304" pitchFamily="18" charset="0"/>
+              </a:rPr>
+              <a:t>Оптимизация рациона питания</a:t>
+            </a:r>
+          </a:p>
+        </p:txBody>
+      </p:sp>
+      <p:sp>
+        <p:nvSpPr>
+          <p:cNvPr id="6" name="TextBox 5">
+            <a:extLst>
+              <a:ext uri="{FF2B5EF4-FFF2-40B4-BE49-F238E27FC236}">
+                <a16:creationId xmlns:a16="http://schemas.microsoft.com/office/drawing/2014/main" id="{4C7BC169-0F15-4D84-9B2A-5AD668779A37}"/>
+              </a:ext>
+            </a:extLst>
+          </p:cNvPr>
+          <p:cNvSpPr txBox="1"/>
+          <p:nvPr/>
+        </p:nvSpPr>
+        <p:spPr>
+          <a:xfrm>
+            <a:off x="513347" y="761637"/>
+            <a:ext cx="6096000" cy="369332"/>
+          </a:xfrm>
+          <a:prstGeom prst="rect">
+            <a:avLst/>
+          </a:prstGeom>
+          <a:noFill/>
+        </p:spPr>
+        <p:txBody>
+          <a:bodyPr wrap="square">
+            <a:spAutoFit/>
+          </a:bodyPr>
+          <a:lstStyle/>
+          <a:p>
+            <a:r>
+              <a:rPr lang="ru-RU" dirty="0"/>
+              <a:t>Выполнение лабораторной работы</a:t>
+            </a:r>
+          </a:p>
+        </p:txBody>
+      </p:sp>
       <p:pic>
         <p:nvPicPr>
-          <p:cNvPr id="3" name="Рисунок 2">
+          <p:cNvPr id="4" name="Рисунок 3">
             <a:extLst>
               <a:ext uri="{FF2B5EF4-FFF2-40B4-BE49-F238E27FC236}">
-                <a16:creationId xmlns:a16="http://schemas.microsoft.com/office/drawing/2014/main" id="{83A6F9DF-C3D5-4867-BF1D-9854691CED54}"/>
+                <a16:creationId xmlns:a16="http://schemas.microsoft.com/office/drawing/2014/main" id="{30DC8F3C-7C97-42C8-9417-40AA6DBFA2CD}"/>
               </a:ext>
             </a:extLst>
           </p:cNvPr>
@@ -5877,127 +6441,14 @@
         </p:blipFill>
         <p:spPr>
           <a:xfrm>
-            <a:off x="1504309" y="1838103"/>
-            <a:ext cx="9183382" cy="3181794"/>
+            <a:off x="2425104" y="1270659"/>
+            <a:ext cx="7341790" cy="4908831"/>
           </a:xfrm>
           <a:prstGeom prst="rect">
             <a:avLst/>
           </a:prstGeom>
         </p:spPr>
       </p:pic>
-      <p:sp>
-        <p:nvSpPr>
-          <p:cNvPr id="5" name="TextBox 4">
-            <a:extLst>
-              <a:ext uri="{FF2B5EF4-FFF2-40B4-BE49-F238E27FC236}">
-                <a16:creationId xmlns:a16="http://schemas.microsoft.com/office/drawing/2014/main" id="{30BB86DF-19E4-4566-9D61-92137447EDF0}"/>
-              </a:ext>
-            </a:extLst>
-          </p:cNvPr>
-          <p:cNvSpPr txBox="1"/>
-          <p:nvPr/>
-        </p:nvSpPr>
-        <p:spPr>
-          <a:xfrm>
-            <a:off x="3545305" y="5702786"/>
-            <a:ext cx="6096000" cy="369332"/>
-          </a:xfrm>
-          <a:prstGeom prst="rect">
-            <a:avLst/>
-          </a:prstGeom>
-          <a:noFill/>
-        </p:spPr>
-        <p:txBody>
-          <a:bodyPr wrap="square">
-            <a:spAutoFit/>
-          </a:bodyPr>
-          <a:lstStyle/>
-          <a:p>
-            <a:pPr>
-              <a:spcAft>
-                <a:spcPts val="600"/>
-              </a:spcAft>
-            </a:pPr>
-            <a:r>
-              <a:rPr lang="ru-RU" sz="1800" i="1" dirty="0">
-                <a:effectLst/>
-                <a:latin typeface="Cambria" panose="02040503050406030204" pitchFamily="18" charset="0"/>
-                <a:ea typeface="Cambria" panose="02040503050406030204" pitchFamily="18" charset="0"/>
-                <a:cs typeface="Times New Roman" panose="02020603050405020304" pitchFamily="18" charset="0"/>
-              </a:rPr>
-              <a:t>Рис</a:t>
-            </a:r>
-            <a:r>
-              <a:rPr lang="en-US" sz="1800" i="1" dirty="0">
-                <a:effectLst/>
-                <a:latin typeface="Cambria" panose="02040503050406030204" pitchFamily="18" charset="0"/>
-                <a:ea typeface="Cambria" panose="02040503050406030204" pitchFamily="18" charset="0"/>
-                <a:cs typeface="Times New Roman" panose="02020603050405020304" pitchFamily="18" charset="0"/>
-              </a:rPr>
-              <a:t>. 5: </a:t>
-            </a:r>
-            <a:r>
-              <a:rPr lang="ru-RU" sz="1800" i="1" dirty="0">
-                <a:effectLst/>
-                <a:latin typeface="Cambria" panose="02040503050406030204" pitchFamily="18" charset="0"/>
-                <a:ea typeface="Cambria" panose="02040503050406030204" pitchFamily="18" charset="0"/>
-                <a:cs typeface="Times New Roman" panose="02020603050405020304" pitchFamily="18" charset="0"/>
-              </a:rPr>
-              <a:t>Установка</a:t>
-            </a:r>
-            <a:r>
-              <a:rPr lang="en-US" sz="1800" i="1" dirty="0">
-                <a:effectLst/>
-                <a:latin typeface="Cambria" panose="02040503050406030204" pitchFamily="18" charset="0"/>
-                <a:ea typeface="Cambria" panose="02040503050406030204" pitchFamily="18" charset="0"/>
-                <a:cs typeface="Times New Roman" panose="02020603050405020304" pitchFamily="18" charset="0"/>
-              </a:rPr>
-              <a:t> Anaconda Distribution (Python 3.x)</a:t>
-            </a:r>
-            <a:endParaRPr lang="ru-RU" sz="1800" i="1" dirty="0">
-              <a:effectLst/>
-              <a:latin typeface="Cambria" panose="02040503050406030204" pitchFamily="18" charset="0"/>
-              <a:ea typeface="Cambria" panose="02040503050406030204" pitchFamily="18" charset="0"/>
-              <a:cs typeface="Times New Roman" panose="02020603050405020304" pitchFamily="18" charset="0"/>
-            </a:endParaRPr>
-          </a:p>
-        </p:txBody>
-      </p:sp>
-      <p:sp>
-        <p:nvSpPr>
-          <p:cNvPr id="6" name="TextBox 5">
-            <a:extLst>
-              <a:ext uri="{FF2B5EF4-FFF2-40B4-BE49-F238E27FC236}">
-                <a16:creationId xmlns:a16="http://schemas.microsoft.com/office/drawing/2014/main" id="{4C7BC169-0F15-4D84-9B2A-5AD668779A37}"/>
-              </a:ext>
-            </a:extLst>
-          </p:cNvPr>
-          <p:cNvSpPr txBox="1"/>
-          <p:nvPr/>
-        </p:nvSpPr>
-        <p:spPr>
-          <a:xfrm>
-            <a:off x="513347" y="761637"/>
-            <a:ext cx="6096000" cy="369332"/>
-          </a:xfrm>
-          <a:prstGeom prst="rect">
-            <a:avLst/>
-          </a:prstGeom>
-          <a:noFill/>
-        </p:spPr>
-        <p:txBody>
-          <a:bodyPr wrap="square">
-            <a:spAutoFit/>
-          </a:bodyPr>
-          <a:lstStyle/>
-          <a:p>
-            <a:r>
-              <a:rPr lang="ru-RU" dirty="0"/>
-              <a:t>Установка необходимых приложений </a:t>
-            </a:r>
-          </a:p>
-        </p:txBody>
-      </p:sp>
     </p:spTree>
     <p:extLst>
       <p:ext uri="{BB962C8B-B14F-4D97-AF65-F5344CB8AC3E}">
@@ -6036,12 +6487,92 @@
           <a:chExt cx="0" cy="0"/>
         </a:xfrm>
       </p:grpSpPr>
+      <p:sp>
+        <p:nvSpPr>
+          <p:cNvPr id="5" name="TextBox 4">
+            <a:extLst>
+              <a:ext uri="{FF2B5EF4-FFF2-40B4-BE49-F238E27FC236}">
+                <a16:creationId xmlns:a16="http://schemas.microsoft.com/office/drawing/2014/main" id="{4A4CB074-05FA-4B04-B4D5-70167D0CB6CF}"/>
+              </a:ext>
+            </a:extLst>
+          </p:cNvPr>
+          <p:cNvSpPr txBox="1"/>
+          <p:nvPr/>
+        </p:nvSpPr>
+        <p:spPr>
+          <a:xfrm>
+            <a:off x="3048000" y="6219675"/>
+            <a:ext cx="6096000" cy="369332"/>
+          </a:xfrm>
+          <a:prstGeom prst="rect">
+            <a:avLst/>
+          </a:prstGeom>
+          <a:noFill/>
+        </p:spPr>
+        <p:txBody>
+          <a:bodyPr wrap="square">
+            <a:spAutoFit/>
+          </a:bodyPr>
+          <a:lstStyle/>
+          <a:p>
+            <a:pPr algn="ctr">
+              <a:spcAft>
+                <a:spcPts val="600"/>
+              </a:spcAft>
+            </a:pPr>
+            <a:r>
+              <a:rPr lang="ru-RU" sz="1800" i="1" dirty="0">
+                <a:effectLst/>
+                <a:latin typeface="Cambria" panose="02040503050406030204" pitchFamily="18" charset="0"/>
+                <a:ea typeface="Cambria" panose="02040503050406030204" pitchFamily="18" charset="0"/>
+                <a:cs typeface="Times New Roman" panose="02020603050405020304" pitchFamily="18" charset="0"/>
+              </a:rPr>
+              <a:t>Рис. 6: Путешествие по миру</a:t>
+            </a:r>
+          </a:p>
+        </p:txBody>
+      </p:sp>
+      <p:sp>
+        <p:nvSpPr>
+          <p:cNvPr id="6" name="TextBox 5">
+            <a:extLst>
+              <a:ext uri="{FF2B5EF4-FFF2-40B4-BE49-F238E27FC236}">
+                <a16:creationId xmlns:a16="http://schemas.microsoft.com/office/drawing/2014/main" id="{5BC43336-E9C6-42F9-BD71-846356A2359A}"/>
+              </a:ext>
+            </a:extLst>
+          </p:cNvPr>
+          <p:cNvSpPr txBox="1"/>
+          <p:nvPr/>
+        </p:nvSpPr>
+        <p:spPr>
+          <a:xfrm>
+            <a:off x="513347" y="761637"/>
+            <a:ext cx="6096000" cy="369332"/>
+          </a:xfrm>
+          <a:prstGeom prst="rect">
+            <a:avLst/>
+          </a:prstGeom>
+          <a:noFill/>
+        </p:spPr>
+        <p:txBody>
+          <a:bodyPr wrap="square">
+            <a:spAutoFit/>
+          </a:bodyPr>
+          <a:lstStyle/>
+          <a:p>
+            <a:r>
+              <a:rPr lang="ru-RU" dirty="0"/>
+              <a:t>Выполнение лабораторной работы</a:t>
+            </a:r>
+          </a:p>
+        </p:txBody>
+      </p:sp>
       <p:pic>
         <p:nvPicPr>
-          <p:cNvPr id="3" name="Рисунок 2">
+          <p:cNvPr id="4" name="Рисунок 3">
             <a:extLst>
               <a:ext uri="{FF2B5EF4-FFF2-40B4-BE49-F238E27FC236}">
-                <a16:creationId xmlns:a16="http://schemas.microsoft.com/office/drawing/2014/main" id="{E8EF3A6D-9FA1-472E-9549-2DC53F924FFE}"/>
+                <a16:creationId xmlns:a16="http://schemas.microsoft.com/office/drawing/2014/main" id="{240464E5-0036-46B1-B16F-8AE0E398DB8E}"/>
               </a:ext>
             </a:extLst>
           </p:cNvPr>
@@ -6058,109 +6589,14 @@
         </p:blipFill>
         <p:spPr>
           <a:xfrm>
-            <a:off x="2118757" y="1439707"/>
-            <a:ext cx="7954485" cy="4620270"/>
+            <a:off x="4111209" y="1246909"/>
+            <a:ext cx="3969582" cy="5056407"/>
           </a:xfrm>
           <a:prstGeom prst="rect">
             <a:avLst/>
           </a:prstGeom>
         </p:spPr>
       </p:pic>
-      <p:sp>
-        <p:nvSpPr>
-          <p:cNvPr id="5" name="TextBox 4">
-            <a:extLst>
-              <a:ext uri="{FF2B5EF4-FFF2-40B4-BE49-F238E27FC236}">
-                <a16:creationId xmlns:a16="http://schemas.microsoft.com/office/drawing/2014/main" id="{4A4CB074-05FA-4B04-B4D5-70167D0CB6CF}"/>
-              </a:ext>
-            </a:extLst>
-          </p:cNvPr>
-          <p:cNvSpPr txBox="1"/>
-          <p:nvPr/>
-        </p:nvSpPr>
-        <p:spPr>
-          <a:xfrm>
-            <a:off x="3657600" y="6184049"/>
-            <a:ext cx="6096000" cy="369332"/>
-          </a:xfrm>
-          <a:prstGeom prst="rect">
-            <a:avLst/>
-          </a:prstGeom>
-          <a:noFill/>
-        </p:spPr>
-        <p:txBody>
-          <a:bodyPr wrap="square">
-            <a:spAutoFit/>
-          </a:bodyPr>
-          <a:lstStyle/>
-          <a:p>
-            <a:pPr>
-              <a:spcAft>
-                <a:spcPts val="600"/>
-              </a:spcAft>
-            </a:pPr>
-            <a:r>
-              <a:rPr lang="ru-RU" sz="1800" i="1" dirty="0">
-                <a:effectLst/>
-                <a:latin typeface="Cambria" panose="02040503050406030204" pitchFamily="18" charset="0"/>
-                <a:ea typeface="Cambria" panose="02040503050406030204" pitchFamily="18" charset="0"/>
-                <a:cs typeface="Times New Roman" panose="02020603050405020304" pitchFamily="18" charset="0"/>
-              </a:rPr>
-              <a:t>Рис. 6: Установка пакетов для работы с </a:t>
-            </a:r>
-            <a:r>
-              <a:rPr lang="ru-RU" sz="1800" i="1" dirty="0" err="1">
-                <a:effectLst/>
-                <a:latin typeface="Cambria" panose="02040503050406030204" pitchFamily="18" charset="0"/>
-                <a:ea typeface="Cambria" panose="02040503050406030204" pitchFamily="18" charset="0"/>
-                <a:cs typeface="Times New Roman" panose="02020603050405020304" pitchFamily="18" charset="0"/>
-              </a:rPr>
-              <a:t>Jupyter</a:t>
-            </a:r>
-            <a:endParaRPr lang="ru-RU" sz="1800" i="1" dirty="0">
-              <a:effectLst/>
-              <a:latin typeface="Cambria" panose="02040503050406030204" pitchFamily="18" charset="0"/>
-              <a:ea typeface="Cambria" panose="02040503050406030204" pitchFamily="18" charset="0"/>
-              <a:cs typeface="Times New Roman" panose="02020603050405020304" pitchFamily="18" charset="0"/>
-            </a:endParaRPr>
-          </a:p>
-        </p:txBody>
-      </p:sp>
-      <p:sp>
-        <p:nvSpPr>
-          <p:cNvPr id="6" name="TextBox 5">
-            <a:extLst>
-              <a:ext uri="{FF2B5EF4-FFF2-40B4-BE49-F238E27FC236}">
-                <a16:creationId xmlns:a16="http://schemas.microsoft.com/office/drawing/2014/main" id="{5BC43336-E9C6-42F9-BD71-846356A2359A}"/>
-              </a:ext>
-            </a:extLst>
-          </p:cNvPr>
-          <p:cNvSpPr txBox="1"/>
-          <p:nvPr/>
-        </p:nvSpPr>
-        <p:spPr>
-          <a:xfrm>
-            <a:off x="513347" y="761637"/>
-            <a:ext cx="6096000" cy="369332"/>
-          </a:xfrm>
-          <a:prstGeom prst="rect">
-            <a:avLst/>
-          </a:prstGeom>
-          <a:noFill/>
-        </p:spPr>
-        <p:txBody>
-          <a:bodyPr wrap="square">
-            <a:spAutoFit/>
-          </a:bodyPr>
-          <a:lstStyle/>
-          <a:p>
-            <a:r>
-              <a:rPr lang="ru-RU" dirty="0"/>
-              <a:t>Установка необходимых приложений </a:t>
-            </a:r>
-          </a:p>
-        </p:txBody>
-      </p:sp>
     </p:spTree>
     <p:extLst>
       <p:ext uri="{BB962C8B-B14F-4D97-AF65-F5344CB8AC3E}">
@@ -6199,12 +6635,92 @@
           <a:chExt cx="0" cy="0"/>
         </a:xfrm>
       </p:grpSpPr>
+      <p:sp>
+        <p:nvSpPr>
+          <p:cNvPr id="5" name="TextBox 4">
+            <a:extLst>
+              <a:ext uri="{FF2B5EF4-FFF2-40B4-BE49-F238E27FC236}">
+                <a16:creationId xmlns:a16="http://schemas.microsoft.com/office/drawing/2014/main" id="{28CF7A9E-D5E6-40EB-9511-A29915F7779C}"/>
+              </a:ext>
+            </a:extLst>
+          </p:cNvPr>
+          <p:cNvSpPr txBox="1"/>
+          <p:nvPr/>
+        </p:nvSpPr>
+        <p:spPr>
+          <a:xfrm>
+            <a:off x="3048000" y="6254051"/>
+            <a:ext cx="6096000" cy="369332"/>
+          </a:xfrm>
+          <a:prstGeom prst="rect">
+            <a:avLst/>
+          </a:prstGeom>
+          <a:noFill/>
+        </p:spPr>
+        <p:txBody>
+          <a:bodyPr wrap="square">
+            <a:spAutoFit/>
+          </a:bodyPr>
+          <a:lstStyle/>
+          <a:p>
+            <a:pPr algn="ctr">
+              <a:spcAft>
+                <a:spcPts val="600"/>
+              </a:spcAft>
+            </a:pPr>
+            <a:r>
+              <a:rPr lang="ru-RU" sz="1800" i="1" dirty="0">
+                <a:effectLst/>
+                <a:latin typeface="Cambria" panose="02040503050406030204" pitchFamily="18" charset="0"/>
+                <a:ea typeface="Cambria" panose="02040503050406030204" pitchFamily="18" charset="0"/>
+                <a:cs typeface="Times New Roman" panose="02020603050405020304" pitchFamily="18" charset="0"/>
+              </a:rPr>
+              <a:t>Рис. 7: Портфельные инвестиции</a:t>
+            </a:r>
+          </a:p>
+        </p:txBody>
+      </p:sp>
+      <p:sp>
+        <p:nvSpPr>
+          <p:cNvPr id="7" name="TextBox 6">
+            <a:extLst>
+              <a:ext uri="{FF2B5EF4-FFF2-40B4-BE49-F238E27FC236}">
+                <a16:creationId xmlns:a16="http://schemas.microsoft.com/office/drawing/2014/main" id="{60770AED-C4BA-4250-832D-00810755CBD6}"/>
+              </a:ext>
+            </a:extLst>
+          </p:cNvPr>
+          <p:cNvSpPr txBox="1"/>
+          <p:nvPr/>
+        </p:nvSpPr>
+        <p:spPr>
+          <a:xfrm>
+            <a:off x="513348" y="724663"/>
+            <a:ext cx="6096000" cy="369332"/>
+          </a:xfrm>
+          <a:prstGeom prst="rect">
+            <a:avLst/>
+          </a:prstGeom>
+          <a:noFill/>
+        </p:spPr>
+        <p:txBody>
+          <a:bodyPr wrap="square">
+            <a:spAutoFit/>
+          </a:bodyPr>
+          <a:lstStyle/>
+          <a:p>
+            <a:r>
+              <a:rPr lang="ru-RU" dirty="0"/>
+              <a:t>Выполнение лабораторной работы</a:t>
+            </a:r>
+          </a:p>
+        </p:txBody>
+      </p:sp>
       <p:pic>
         <p:nvPicPr>
-          <p:cNvPr id="3" name="Рисунок 2">
+          <p:cNvPr id="4" name="Рисунок 3">
             <a:extLst>
               <a:ext uri="{FF2B5EF4-FFF2-40B4-BE49-F238E27FC236}">
-                <a16:creationId xmlns:a16="http://schemas.microsoft.com/office/drawing/2014/main" id="{9C43EE66-89BF-4D64-8947-B790334607BB}"/>
+                <a16:creationId xmlns:a16="http://schemas.microsoft.com/office/drawing/2014/main" id="{F886887A-004E-4C63-B7F1-7DCE19739CDB}"/>
               </a:ext>
             </a:extLst>
           </p:cNvPr>
@@ -6221,94 +6737,14 @@
         </p:blipFill>
         <p:spPr>
           <a:xfrm>
-            <a:off x="1485256" y="1518928"/>
-            <a:ext cx="9221487" cy="4429743"/>
+            <a:off x="3204358" y="1270660"/>
+            <a:ext cx="5783284" cy="5009972"/>
           </a:xfrm>
           <a:prstGeom prst="rect">
             <a:avLst/>
           </a:prstGeom>
         </p:spPr>
       </p:pic>
-      <p:sp>
-        <p:nvSpPr>
-          <p:cNvPr id="5" name="TextBox 4">
-            <a:extLst>
-              <a:ext uri="{FF2B5EF4-FFF2-40B4-BE49-F238E27FC236}">
-                <a16:creationId xmlns:a16="http://schemas.microsoft.com/office/drawing/2014/main" id="{28CF7A9E-D5E6-40EB-9511-A29915F7779C}"/>
-              </a:ext>
-            </a:extLst>
-          </p:cNvPr>
-          <p:cNvSpPr txBox="1"/>
-          <p:nvPr/>
-        </p:nvSpPr>
-        <p:spPr>
-          <a:xfrm>
-            <a:off x="3047999" y="6087796"/>
-            <a:ext cx="6096000" cy="369332"/>
-          </a:xfrm>
-          <a:prstGeom prst="rect">
-            <a:avLst/>
-          </a:prstGeom>
-          <a:noFill/>
-        </p:spPr>
-        <p:txBody>
-          <a:bodyPr wrap="square">
-            <a:spAutoFit/>
-          </a:bodyPr>
-          <a:lstStyle/>
-          <a:p>
-            <a:pPr>
-              <a:spcAft>
-                <a:spcPts val="600"/>
-              </a:spcAft>
-            </a:pPr>
-            <a:r>
-              <a:rPr lang="ru-RU" sz="1800" i="1" dirty="0">
-                <a:effectLst/>
-                <a:latin typeface="Cambria" panose="02040503050406030204" pitchFamily="18" charset="0"/>
-                <a:ea typeface="Cambria" panose="02040503050406030204" pitchFamily="18" charset="0"/>
-                <a:cs typeface="Times New Roman" panose="02020603050405020304" pitchFamily="18" charset="0"/>
-              </a:rPr>
-              <a:t>Рис. 7: Примеры определения типа числовых величин</a:t>
-            </a:r>
-          </a:p>
-        </p:txBody>
-      </p:sp>
-      <p:sp>
-        <p:nvSpPr>
-          <p:cNvPr id="7" name="TextBox 6">
-            <a:extLst>
-              <a:ext uri="{FF2B5EF4-FFF2-40B4-BE49-F238E27FC236}">
-                <a16:creationId xmlns:a16="http://schemas.microsoft.com/office/drawing/2014/main" id="{60770AED-C4BA-4250-832D-00810755CBD6}"/>
-              </a:ext>
-            </a:extLst>
-          </p:cNvPr>
-          <p:cNvSpPr txBox="1"/>
-          <p:nvPr/>
-        </p:nvSpPr>
-        <p:spPr>
-          <a:xfrm>
-            <a:off x="513348" y="724663"/>
-            <a:ext cx="6096000" cy="369332"/>
-          </a:xfrm>
-          <a:prstGeom prst="rect">
-            <a:avLst/>
-          </a:prstGeom>
-          <a:noFill/>
-        </p:spPr>
-        <p:txBody>
-          <a:bodyPr wrap="square">
-            <a:spAutoFit/>
-          </a:bodyPr>
-          <a:lstStyle/>
-          <a:p>
-            <a:r>
-              <a:rPr lang="ru-RU" dirty="0"/>
-              <a:t>Примеры</a:t>
-            </a:r>
-          </a:p>
-        </p:txBody>
-      </p:sp>
     </p:spTree>
     <p:extLst>
       <p:ext uri="{BB962C8B-B14F-4D97-AF65-F5344CB8AC3E}">
@@ -6347,12 +6783,92 @@
           <a:chExt cx="0" cy="0"/>
         </a:xfrm>
       </p:grpSpPr>
+      <p:sp>
+        <p:nvSpPr>
+          <p:cNvPr id="5" name="TextBox 4">
+            <a:extLst>
+              <a:ext uri="{FF2B5EF4-FFF2-40B4-BE49-F238E27FC236}">
+                <a16:creationId xmlns:a16="http://schemas.microsoft.com/office/drawing/2014/main" id="{5E20638D-0051-4797-8209-588948EA79B7}"/>
+              </a:ext>
+            </a:extLst>
+          </p:cNvPr>
+          <p:cNvSpPr txBox="1"/>
+          <p:nvPr/>
+        </p:nvSpPr>
+        <p:spPr>
+          <a:xfrm>
+            <a:off x="3048000" y="6219466"/>
+            <a:ext cx="6096000" cy="369332"/>
+          </a:xfrm>
+          <a:prstGeom prst="rect">
+            <a:avLst/>
+          </a:prstGeom>
+          <a:noFill/>
+        </p:spPr>
+        <p:txBody>
+          <a:bodyPr wrap="square">
+            <a:spAutoFit/>
+          </a:bodyPr>
+          <a:lstStyle/>
+          <a:p>
+            <a:pPr algn="ctr">
+              <a:spcAft>
+                <a:spcPts val="600"/>
+              </a:spcAft>
+            </a:pPr>
+            <a:r>
+              <a:rPr lang="ru-RU" sz="1800" i="1" dirty="0">
+                <a:effectLst/>
+                <a:latin typeface="Cambria" panose="02040503050406030204" pitchFamily="18" charset="0"/>
+                <a:ea typeface="Cambria" panose="02040503050406030204" pitchFamily="18" charset="0"/>
+                <a:cs typeface="Times New Roman" panose="02020603050405020304" pitchFamily="18" charset="0"/>
+              </a:rPr>
+              <a:t>Рис. 8: Портфельные инвестиции</a:t>
+            </a:r>
+          </a:p>
+        </p:txBody>
+      </p:sp>
+      <p:sp>
+        <p:nvSpPr>
+          <p:cNvPr id="6" name="TextBox 5">
+            <a:extLst>
+              <a:ext uri="{FF2B5EF4-FFF2-40B4-BE49-F238E27FC236}">
+                <a16:creationId xmlns:a16="http://schemas.microsoft.com/office/drawing/2014/main" id="{D175B722-54CC-46D8-9390-4556FCB5881A}"/>
+              </a:ext>
+            </a:extLst>
+          </p:cNvPr>
+          <p:cNvSpPr txBox="1"/>
+          <p:nvPr/>
+        </p:nvSpPr>
+        <p:spPr>
+          <a:xfrm>
+            <a:off x="513348" y="724663"/>
+            <a:ext cx="6096000" cy="369332"/>
+          </a:xfrm>
+          <a:prstGeom prst="rect">
+            <a:avLst/>
+          </a:prstGeom>
+          <a:noFill/>
+        </p:spPr>
+        <p:txBody>
+          <a:bodyPr wrap="square">
+            <a:spAutoFit/>
+          </a:bodyPr>
+          <a:lstStyle/>
+          <a:p>
+            <a:r>
+              <a:rPr lang="ru-RU" dirty="0"/>
+              <a:t>Выполнение лабораторной работы</a:t>
+            </a:r>
+          </a:p>
+        </p:txBody>
+      </p:sp>
       <p:pic>
         <p:nvPicPr>
-          <p:cNvPr id="3" name="Рисунок 2">
+          <p:cNvPr id="4" name="Рисунок 3">
             <a:extLst>
               <a:ext uri="{FF2B5EF4-FFF2-40B4-BE49-F238E27FC236}">
-                <a16:creationId xmlns:a16="http://schemas.microsoft.com/office/drawing/2014/main" id="{9B435FC1-E92E-4508-B6B2-4336A936F148}"/>
+                <a16:creationId xmlns:a16="http://schemas.microsoft.com/office/drawing/2014/main" id="{50829EE4-0272-4A18-A7C7-E64A2D4ED08A}"/>
               </a:ext>
             </a:extLst>
           </p:cNvPr>
@@ -6369,94 +6885,14 @@
         </p:blipFill>
         <p:spPr>
           <a:xfrm>
-            <a:off x="2013968" y="2390630"/>
-            <a:ext cx="8164064" cy="2076740"/>
+            <a:off x="3740727" y="1258783"/>
+            <a:ext cx="4702569" cy="5028231"/>
           </a:xfrm>
           <a:prstGeom prst="rect">
             <a:avLst/>
           </a:prstGeom>
         </p:spPr>
       </p:pic>
-      <p:sp>
-        <p:nvSpPr>
-          <p:cNvPr id="5" name="TextBox 4">
-            <a:extLst>
-              <a:ext uri="{FF2B5EF4-FFF2-40B4-BE49-F238E27FC236}">
-                <a16:creationId xmlns:a16="http://schemas.microsoft.com/office/drawing/2014/main" id="{5E20638D-0051-4797-8209-588948EA79B7}"/>
-              </a:ext>
-            </a:extLst>
-          </p:cNvPr>
-          <p:cNvSpPr txBox="1"/>
-          <p:nvPr/>
-        </p:nvSpPr>
-        <p:spPr>
-          <a:xfrm>
-            <a:off x="3048000" y="5863207"/>
-            <a:ext cx="6096000" cy="369332"/>
-          </a:xfrm>
-          <a:prstGeom prst="rect">
-            <a:avLst/>
-          </a:prstGeom>
-          <a:noFill/>
-        </p:spPr>
-        <p:txBody>
-          <a:bodyPr wrap="square">
-            <a:spAutoFit/>
-          </a:bodyPr>
-          <a:lstStyle/>
-          <a:p>
-            <a:pPr>
-              <a:spcAft>
-                <a:spcPts val="600"/>
-              </a:spcAft>
-            </a:pPr>
-            <a:r>
-              <a:rPr lang="ru-RU" sz="1800" i="1" dirty="0">
-                <a:effectLst/>
-                <a:latin typeface="Cambria" panose="02040503050406030204" pitchFamily="18" charset="0"/>
-                <a:ea typeface="Cambria" panose="02040503050406030204" pitchFamily="18" charset="0"/>
-                <a:cs typeface="Times New Roman" panose="02020603050405020304" pitchFamily="18" charset="0"/>
-              </a:rPr>
-              <a:t>Рис. 8: Примеры приведения аргументов к одному типу</a:t>
-            </a:r>
-          </a:p>
-        </p:txBody>
-      </p:sp>
-      <p:sp>
-        <p:nvSpPr>
-          <p:cNvPr id="6" name="TextBox 5">
-            <a:extLst>
-              <a:ext uri="{FF2B5EF4-FFF2-40B4-BE49-F238E27FC236}">
-                <a16:creationId xmlns:a16="http://schemas.microsoft.com/office/drawing/2014/main" id="{D175B722-54CC-46D8-9390-4556FCB5881A}"/>
-              </a:ext>
-            </a:extLst>
-          </p:cNvPr>
-          <p:cNvSpPr txBox="1"/>
-          <p:nvPr/>
-        </p:nvSpPr>
-        <p:spPr>
-          <a:xfrm>
-            <a:off x="513348" y="724663"/>
-            <a:ext cx="6096000" cy="369332"/>
-          </a:xfrm>
-          <a:prstGeom prst="rect">
-            <a:avLst/>
-          </a:prstGeom>
-          <a:noFill/>
-        </p:spPr>
-        <p:txBody>
-          <a:bodyPr wrap="square">
-            <a:spAutoFit/>
-          </a:bodyPr>
-          <a:lstStyle/>
-          <a:p>
-            <a:r>
-              <a:rPr lang="ru-RU" dirty="0"/>
-              <a:t>Примеры</a:t>
-            </a:r>
-          </a:p>
-        </p:txBody>
-      </p:sp>
     </p:spTree>
     <p:extLst>
       <p:ext uri="{BB962C8B-B14F-4D97-AF65-F5344CB8AC3E}">
